--- a/Java_Week3.pptx
+++ b/Java_Week3.pptx
@@ -6,14 +6,22 @@
     <p:sldMasterId id="2147483796" r:id="rId2"/>
   </p:sldMasterIdLst>
   <p:notesMasterIdLst>
-    <p:notesMasterId r:id="rId5"/>
+    <p:notesMasterId r:id="rId13"/>
   </p:notesMasterIdLst>
   <p:handoutMasterIdLst>
-    <p:handoutMasterId r:id="rId6"/>
+    <p:handoutMasterId r:id="rId14"/>
   </p:handoutMasterIdLst>
   <p:sldIdLst>
     <p:sldId id="689" r:id="rId3"/>
     <p:sldId id="690" r:id="rId4"/>
+    <p:sldId id="691" r:id="rId5"/>
+    <p:sldId id="692" r:id="rId6"/>
+    <p:sldId id="693" r:id="rId7"/>
+    <p:sldId id="694" r:id="rId8"/>
+    <p:sldId id="695" r:id="rId9"/>
+    <p:sldId id="696" r:id="rId10"/>
+    <p:sldId id="697" r:id="rId11"/>
+    <p:sldId id="698" r:id="rId12"/>
   </p:sldIdLst>
   <p:sldSz cx="9906000" cy="6858000" type="A4"/>
   <p:notesSz cx="7104063" cy="10234613"/>
@@ -2566,7 +2574,7 @@
           <a:p>
             <a:fld id="{A1E4D65A-0EC1-4CBC-8539-F9FD2B92F981}" type="datetimeFigureOut">
               <a:rPr kumimoji="1" lang="ja-JP" altLang="en-US" smtClean="0"/>
-              <a:t>2026/8/6</a:t>
+              <a:t>2026/8/7</a:t>
             </a:fld>
             <a:endParaRPr kumimoji="1" lang="ja-JP" altLang="en-US"/>
           </a:p>
@@ -4928,7 +4936,7 @@
           <a:p>
             <a:fld id="{A1E4D65A-0EC1-4CBC-8539-F9FD2B92F981}" type="datetimeFigureOut">
               <a:rPr kumimoji="1" lang="ja-JP" altLang="en-US" smtClean="0"/>
-              <a:t>2026/8/6</a:t>
+              <a:t>2026/8/7</a:t>
             </a:fld>
             <a:endParaRPr kumimoji="1" lang="ja-JP" altLang="en-US"/>
           </a:p>
@@ -5507,6 +5515,129 @@
 </p:sld>
 </file>
 
+<file path=ppt/slides/slide10.xml><?xml version="1.0" encoding="utf-8"?>
+<p:sld xmlns:a="http://schemas.openxmlformats.org/drawingml/2006/main" xmlns:r="http://schemas.openxmlformats.org/officeDocument/2006/relationships" xmlns:p="http://schemas.openxmlformats.org/presentationml/2006/main">
+  <p:cSld>
+    <p:spTree>
+      <p:nvGrpSpPr>
+        <p:cNvPr id="1" name=""/>
+        <p:cNvGrpSpPr/>
+        <p:nvPr/>
+      </p:nvGrpSpPr>
+      <p:grpSpPr>
+        <a:xfrm>
+          <a:off x="0" y="0"/>
+          <a:ext cx="0" cy="0"/>
+          <a:chOff x="0" y="0"/>
+          <a:chExt cx="0" cy="0"/>
+        </a:xfrm>
+      </p:grpSpPr>
+      <p:sp>
+        <p:nvSpPr>
+          <p:cNvPr id="2" name="Title 1">
+            <a:extLst>
+              <a:ext uri="{FF2B5EF4-FFF2-40B4-BE49-F238E27FC236}">
+                <a16:creationId xmlns:a16="http://schemas.microsoft.com/office/drawing/2014/main" id="{F8D9EC49-14F9-7C5B-C51C-65CB6C44DB53}"/>
+              </a:ext>
+            </a:extLst>
+          </p:cNvPr>
+          <p:cNvSpPr>
+            <a:spLocks noGrp="1"/>
+          </p:cNvSpPr>
+          <p:nvPr>
+            <p:ph type="title"/>
+          </p:nvPr>
+        </p:nvSpPr>
+        <p:spPr/>
+        <p:txBody>
+          <a:bodyPr/>
+          <a:lstStyle/>
+          <a:p>
+            <a:endParaRPr kumimoji="1" lang="ja-JP" altLang="en-US"/>
+          </a:p>
+        </p:txBody>
+      </p:sp>
+      <p:sp>
+        <p:nvSpPr>
+          <p:cNvPr id="3" name="Content Placeholder 2">
+            <a:extLst>
+              <a:ext uri="{FF2B5EF4-FFF2-40B4-BE49-F238E27FC236}">
+                <a16:creationId xmlns:a16="http://schemas.microsoft.com/office/drawing/2014/main" id="{76EC0B77-6AD0-368D-8EB2-F5471FECBFA9}"/>
+              </a:ext>
+            </a:extLst>
+          </p:cNvPr>
+          <p:cNvSpPr>
+            <a:spLocks noGrp="1"/>
+          </p:cNvSpPr>
+          <p:nvPr>
+            <p:ph idx="1"/>
+          </p:nvPr>
+        </p:nvSpPr>
+        <p:spPr/>
+        <p:txBody>
+          <a:bodyPr/>
+          <a:lstStyle/>
+          <a:p>
+            <a:endParaRPr kumimoji="1" lang="ja-JP" altLang="en-US"/>
+          </a:p>
+        </p:txBody>
+      </p:sp>
+      <p:sp>
+        <p:nvSpPr>
+          <p:cNvPr id="4" name="Slide Number Placeholder 3">
+            <a:extLst>
+              <a:ext uri="{FF2B5EF4-FFF2-40B4-BE49-F238E27FC236}">
+                <a16:creationId xmlns:a16="http://schemas.microsoft.com/office/drawing/2014/main" id="{34F2EA56-7375-A1D0-3AD4-CE7697A6BF72}"/>
+              </a:ext>
+            </a:extLst>
+          </p:cNvPr>
+          <p:cNvSpPr>
+            <a:spLocks noGrp="1"/>
+          </p:cNvSpPr>
+          <p:nvPr>
+            <p:ph type="sldNum" sz="quarter" idx="11"/>
+          </p:nvPr>
+        </p:nvSpPr>
+        <p:spPr/>
+        <p:txBody>
+          <a:bodyPr/>
+          <a:lstStyle/>
+          <a:p>
+            <a:pPr>
+              <a:defRPr/>
+            </a:pPr>
+            <a:r>
+              <a:rPr lang="en-US" altLang="ja-JP"/>
+              <a:t>Page:</a:t>
+            </a:r>
+            <a:r>
+              <a:rPr lang="ja-JP" altLang="en-US"/>
+              <a:t> </a:t>
+            </a:r>
+            <a:fld id="{DC07468E-517B-4E9D-8840-A4568A307980}" type="slidenum">
+              <a:rPr lang="en-US" altLang="ja-JP" smtClean="0"/>
+              <a:pPr>
+                <a:defRPr/>
+              </a:pPr>
+              <a:t>10</a:t>
+            </a:fld>
+            <a:endParaRPr lang="en-US" altLang="ja-JP"/>
+          </a:p>
+        </p:txBody>
+      </p:sp>
+    </p:spTree>
+    <p:extLst>
+      <p:ext uri="{BB962C8B-B14F-4D97-AF65-F5344CB8AC3E}">
+        <p14:creationId xmlns:p14="http://schemas.microsoft.com/office/powerpoint/2010/main" val="1704401026"/>
+      </p:ext>
+    </p:extLst>
+  </p:cSld>
+  <p:clrMapOvr>
+    <a:masterClrMapping/>
+  </p:clrMapOvr>
+</p:sld>
+</file>
+
 <file path=ppt/slides/slide2.xml><?xml version="1.0" encoding="utf-8"?>
 <p:sld xmlns:a="http://schemas.openxmlformats.org/drawingml/2006/main" xmlns:r="http://schemas.openxmlformats.org/officeDocument/2006/relationships" xmlns:p="http://schemas.openxmlformats.org/presentationml/2006/main">
   <p:cSld>
@@ -5542,10 +5673,16 @@
         </p:nvSpPr>
         <p:spPr/>
         <p:txBody>
-          <a:bodyPr/>
+          <a:bodyPr>
+            <a:normAutofit fontScale="90000"/>
+          </a:bodyPr>
           <a:lstStyle/>
           <a:p>
-            <a:endParaRPr kumimoji="1" lang="ja-JP" altLang="en-US"/>
+            <a:r>
+              <a:rPr lang="ja-JP" altLang="ja-JP" dirty="0"/>
+              <a:t>Lớp String &amp; Các Phương Thức Phổ Biến</a:t>
+            </a:r>
+            <a:endParaRPr kumimoji="1" lang="ja-JP" altLang="en-US" dirty="0"/>
           </a:p>
         </p:txBody>
       </p:sp>
@@ -5570,7 +5707,20 @@
           <a:bodyPr/>
           <a:lstStyle/>
           <a:p>
-            <a:endParaRPr kumimoji="1" lang="ja-JP" altLang="en-US"/>
+            <a:r>
+              <a:rPr lang="ja-JP" altLang="ja-JP" dirty="0"/>
+              <a:t>Mục tiêu: </a:t>
+            </a:r>
+          </a:p>
+          <a:p>
+            <a:pPr lvl="1"/>
+            <a:r>
+              <a:rPr lang="ja-JP" altLang="ja-JP" dirty="0"/>
+              <a:t>Biết cách khai báo, khởi tạo và sử dụng các phương thức thông dụng của String. (kiểu dữ liệu được dùng nhiều nhất)</a:t>
+            </a:r>
+          </a:p>
+          <a:p>
+            <a:endParaRPr kumimoji="1" lang="ja-JP" altLang="en-US" dirty="0"/>
           </a:p>
         </p:txBody>
       </p:sp>
@@ -5621,6 +5771,2374 @@
     <p:extLst>
       <p:ext uri="{BB962C8B-B14F-4D97-AF65-F5344CB8AC3E}">
         <p14:creationId xmlns:p14="http://schemas.microsoft.com/office/powerpoint/2010/main" val="4132564350"/>
+      </p:ext>
+    </p:extLst>
+  </p:cSld>
+  <p:clrMapOvr>
+    <a:masterClrMapping/>
+  </p:clrMapOvr>
+</p:sld>
+</file>
+
+<file path=ppt/slides/slide3.xml><?xml version="1.0" encoding="utf-8"?>
+<p:sld xmlns:a="http://schemas.openxmlformats.org/drawingml/2006/main" xmlns:r="http://schemas.openxmlformats.org/officeDocument/2006/relationships" xmlns:p="http://schemas.openxmlformats.org/presentationml/2006/main">
+  <p:cSld>
+    <p:spTree>
+      <p:nvGrpSpPr>
+        <p:cNvPr id="1" name=""/>
+        <p:cNvGrpSpPr/>
+        <p:nvPr/>
+      </p:nvGrpSpPr>
+      <p:grpSpPr>
+        <a:xfrm>
+          <a:off x="0" y="0"/>
+          <a:ext cx="0" cy="0"/>
+          <a:chOff x="0" y="0"/>
+          <a:chExt cx="0" cy="0"/>
+        </a:xfrm>
+      </p:grpSpPr>
+      <p:sp>
+        <p:nvSpPr>
+          <p:cNvPr id="2" name="Title 1">
+            <a:extLst>
+              <a:ext uri="{FF2B5EF4-FFF2-40B4-BE49-F238E27FC236}">
+                <a16:creationId xmlns:a16="http://schemas.microsoft.com/office/drawing/2014/main" id="{170570B5-BCA9-CBF1-649E-140CF5D22301}"/>
+              </a:ext>
+            </a:extLst>
+          </p:cNvPr>
+          <p:cNvSpPr>
+            <a:spLocks noGrp="1"/>
+          </p:cNvSpPr>
+          <p:nvPr>
+            <p:ph type="title"/>
+          </p:nvPr>
+        </p:nvSpPr>
+        <p:spPr/>
+        <p:txBody>
+          <a:bodyPr>
+            <a:normAutofit fontScale="90000"/>
+          </a:bodyPr>
+          <a:lstStyle/>
+          <a:p>
+            <a:r>
+              <a:rPr lang="ja-JP" altLang="ja-JP" dirty="0"/>
+              <a:t>String (chuỗi)</a:t>
+            </a:r>
+            <a:endParaRPr kumimoji="1" lang="ja-JP" altLang="en-US" dirty="0"/>
+          </a:p>
+        </p:txBody>
+      </p:sp>
+      <p:sp>
+        <p:nvSpPr>
+          <p:cNvPr id="3" name="Content Placeholder 2">
+            <a:extLst>
+              <a:ext uri="{FF2B5EF4-FFF2-40B4-BE49-F238E27FC236}">
+                <a16:creationId xmlns:a16="http://schemas.microsoft.com/office/drawing/2014/main" id="{887FDCD9-8893-292F-55D4-4766782531F7}"/>
+              </a:ext>
+            </a:extLst>
+          </p:cNvPr>
+          <p:cNvSpPr>
+            <a:spLocks noGrp="1"/>
+          </p:cNvSpPr>
+          <p:nvPr>
+            <p:ph idx="1"/>
+          </p:nvPr>
+        </p:nvSpPr>
+        <p:spPr/>
+        <p:txBody>
+          <a:bodyPr>
+            <a:normAutofit/>
+          </a:bodyPr>
+          <a:lstStyle/>
+          <a:p>
+            <a:r>
+              <a:rPr lang="ja-JP" altLang="ja-JP" b="1" dirty="0"/>
+              <a:t>Cách khai báo:</a:t>
+            </a:r>
+            <a:endParaRPr lang="ja-JP" altLang="ja-JP" dirty="0"/>
+          </a:p>
+          <a:p>
+            <a:pPr lvl="1"/>
+            <a:r>
+              <a:rPr lang="ja-JP" altLang="ja-JP" dirty="0"/>
+              <a:t>String s1 = "Java";</a:t>
+            </a:r>
+          </a:p>
+          <a:p>
+            <a:pPr lvl="1"/>
+            <a:r>
+              <a:rPr lang="ja-JP" altLang="ja-JP" dirty="0"/>
+              <a:t>String s2 = new String(“</a:t>
+            </a:r>
+            <a:r>
+              <a:rPr lang="en-US" altLang="ja-JP" dirty="0"/>
+              <a:t>Java</a:t>
+            </a:r>
+            <a:r>
+              <a:rPr lang="ja-JP" altLang="ja-JP" dirty="0"/>
+              <a:t>");</a:t>
+            </a:r>
+          </a:p>
+          <a:p>
+            <a:r>
+              <a:rPr kumimoji="1" lang="vi-VN" altLang="ja-JP" dirty="0"/>
+              <a:t>Các phương thức thường dùng:</a:t>
+            </a:r>
+          </a:p>
+          <a:p>
+            <a:pPr lvl="1"/>
+            <a:r>
+              <a:rPr kumimoji="1" lang="vi-VN" altLang="ja-JP" dirty="0"/>
+              <a:t>length()	</a:t>
+            </a:r>
+            <a:r>
+              <a:rPr kumimoji="1" lang="vi-VN" altLang="ja-JP" i="1" dirty="0"/>
+              <a:t>Độ dài chuỗi</a:t>
+            </a:r>
+          </a:p>
+          <a:p>
+            <a:pPr lvl="1"/>
+            <a:r>
+              <a:rPr kumimoji="1" lang="vi-VN" altLang="ja-JP" dirty="0"/>
+              <a:t>charAt(int)	</a:t>
+            </a:r>
+            <a:r>
+              <a:rPr kumimoji="1" lang="vi-VN" altLang="ja-JP" i="1" dirty="0"/>
+              <a:t>Lấy ký tự tại vị trí</a:t>
+            </a:r>
+          </a:p>
+          <a:p>
+            <a:pPr lvl="1"/>
+            <a:r>
+              <a:rPr kumimoji="1" lang="vi-VN" altLang="ja-JP" dirty="0"/>
+              <a:t>substring(start, end)	</a:t>
+            </a:r>
+            <a:r>
+              <a:rPr kumimoji="1" lang="vi-VN" altLang="ja-JP" i="1" dirty="0"/>
+              <a:t>Cắt chuỗi con</a:t>
+            </a:r>
+          </a:p>
+          <a:p>
+            <a:pPr lvl="1"/>
+            <a:r>
+              <a:rPr kumimoji="1" lang="vi-VN" altLang="ja-JP" dirty="0"/>
+              <a:t>indexOf(String)	</a:t>
+            </a:r>
+            <a:r>
+              <a:rPr kumimoji="1" lang="vi-VN" altLang="ja-JP" i="1" dirty="0"/>
+              <a:t>Tìm vị trí ký tự/chuỗi</a:t>
+            </a:r>
+          </a:p>
+          <a:p>
+            <a:pPr lvl="1"/>
+            <a:r>
+              <a:rPr kumimoji="1" lang="vi-VN" altLang="ja-JP" dirty="0"/>
+              <a:t>toUpperCase()	 </a:t>
+            </a:r>
+            <a:r>
+              <a:rPr kumimoji="1" lang="vi-VN" altLang="ja-JP" i="1" dirty="0"/>
+              <a:t>Chuyển thành chữ in hoa</a:t>
+            </a:r>
+          </a:p>
+          <a:p>
+            <a:pPr lvl="1"/>
+            <a:r>
+              <a:rPr kumimoji="1" lang="vi-VN" altLang="ja-JP" dirty="0"/>
+              <a:t>trim()	 </a:t>
+            </a:r>
+            <a:r>
+              <a:rPr kumimoji="1" lang="vi-VN" altLang="ja-JP" i="1" dirty="0"/>
+              <a:t>Xóa khoảng trắng đầu/cuối</a:t>
+            </a:r>
+          </a:p>
+          <a:p>
+            <a:endParaRPr kumimoji="1" lang="ja-JP" altLang="en-US" dirty="0"/>
+          </a:p>
+        </p:txBody>
+      </p:sp>
+      <p:sp>
+        <p:nvSpPr>
+          <p:cNvPr id="4" name="Slide Number Placeholder 3">
+            <a:extLst>
+              <a:ext uri="{FF2B5EF4-FFF2-40B4-BE49-F238E27FC236}">
+                <a16:creationId xmlns:a16="http://schemas.microsoft.com/office/drawing/2014/main" id="{79923081-68B4-4118-CAF8-0190ED25B423}"/>
+              </a:ext>
+            </a:extLst>
+          </p:cNvPr>
+          <p:cNvSpPr>
+            <a:spLocks noGrp="1"/>
+          </p:cNvSpPr>
+          <p:nvPr>
+            <p:ph type="sldNum" sz="quarter" idx="11"/>
+          </p:nvPr>
+        </p:nvSpPr>
+        <p:spPr/>
+        <p:txBody>
+          <a:bodyPr/>
+          <a:lstStyle/>
+          <a:p>
+            <a:pPr>
+              <a:defRPr/>
+            </a:pPr>
+            <a:r>
+              <a:rPr lang="en-US" altLang="ja-JP"/>
+              <a:t>Page:</a:t>
+            </a:r>
+            <a:r>
+              <a:rPr lang="ja-JP" altLang="en-US"/>
+              <a:t> </a:t>
+            </a:r>
+            <a:fld id="{DC07468E-517B-4E9D-8840-A4568A307980}" type="slidenum">
+              <a:rPr lang="en-US" altLang="ja-JP" smtClean="0"/>
+              <a:pPr>
+                <a:defRPr/>
+              </a:pPr>
+              <a:t>3</a:t>
+            </a:fld>
+            <a:endParaRPr lang="en-US" altLang="ja-JP"/>
+          </a:p>
+        </p:txBody>
+      </p:sp>
+    </p:spTree>
+    <p:extLst>
+      <p:ext uri="{BB962C8B-B14F-4D97-AF65-F5344CB8AC3E}">
+        <p14:creationId xmlns:p14="http://schemas.microsoft.com/office/powerpoint/2010/main" val="824972255"/>
+      </p:ext>
+    </p:extLst>
+  </p:cSld>
+  <p:clrMapOvr>
+    <a:masterClrMapping/>
+  </p:clrMapOvr>
+</p:sld>
+</file>
+
+<file path=ppt/slides/slide4.xml><?xml version="1.0" encoding="utf-8"?>
+<p:sld xmlns:a="http://schemas.openxmlformats.org/drawingml/2006/main" xmlns:r="http://schemas.openxmlformats.org/officeDocument/2006/relationships" xmlns:p="http://schemas.openxmlformats.org/presentationml/2006/main">
+  <p:cSld>
+    <p:spTree>
+      <p:nvGrpSpPr>
+        <p:cNvPr id="1" name=""/>
+        <p:cNvGrpSpPr/>
+        <p:nvPr/>
+      </p:nvGrpSpPr>
+      <p:grpSpPr>
+        <a:xfrm>
+          <a:off x="0" y="0"/>
+          <a:ext cx="0" cy="0"/>
+          <a:chOff x="0" y="0"/>
+          <a:chExt cx="0" cy="0"/>
+        </a:xfrm>
+      </p:grpSpPr>
+      <p:sp>
+        <p:nvSpPr>
+          <p:cNvPr id="2" name="Title 1">
+            <a:extLst>
+              <a:ext uri="{FF2B5EF4-FFF2-40B4-BE49-F238E27FC236}">
+                <a16:creationId xmlns:a16="http://schemas.microsoft.com/office/drawing/2014/main" id="{1AD06A81-3A04-08A2-1775-952430287327}"/>
+              </a:ext>
+            </a:extLst>
+          </p:cNvPr>
+          <p:cNvSpPr>
+            <a:spLocks noGrp="1"/>
+          </p:cNvSpPr>
+          <p:nvPr>
+            <p:ph type="title"/>
+          </p:nvPr>
+        </p:nvSpPr>
+        <p:spPr/>
+        <p:txBody>
+          <a:bodyPr>
+            <a:normAutofit fontScale="90000"/>
+          </a:bodyPr>
+          <a:lstStyle/>
+          <a:p>
+            <a:r>
+              <a:rPr lang="ja-JP" altLang="ja-JP" dirty="0"/>
+              <a:t>So sánh chuỗ</a:t>
+            </a:r>
+            <a:r>
+              <a:rPr lang="en-US" altLang="ja-JP" dirty="0" err="1"/>
+              <a:t>i</a:t>
+            </a:r>
+            <a:endParaRPr kumimoji="1" lang="ja-JP" altLang="en-US" dirty="0"/>
+          </a:p>
+        </p:txBody>
+      </p:sp>
+      <p:sp>
+        <p:nvSpPr>
+          <p:cNvPr id="3" name="Content Placeholder 2">
+            <a:extLst>
+              <a:ext uri="{FF2B5EF4-FFF2-40B4-BE49-F238E27FC236}">
+                <a16:creationId xmlns:a16="http://schemas.microsoft.com/office/drawing/2014/main" id="{4D0D5709-A5CC-EB3C-216E-FAFB4B8B049B}"/>
+              </a:ext>
+            </a:extLst>
+          </p:cNvPr>
+          <p:cNvSpPr>
+            <a:spLocks noGrp="1"/>
+          </p:cNvSpPr>
+          <p:nvPr>
+            <p:ph idx="1"/>
+          </p:nvPr>
+        </p:nvSpPr>
+        <p:spPr/>
+        <p:txBody>
+          <a:bodyPr/>
+          <a:lstStyle/>
+          <a:p>
+            <a:pPr lvl="0"/>
+            <a:r>
+              <a:rPr lang="ja-JP" altLang="ja-JP" dirty="0"/>
+              <a:t>Hiểu sự khác biệt giữa == và .equals() khi so sánh chuỗi.</a:t>
+            </a:r>
+          </a:p>
+          <a:p>
+            <a:pPr lvl="0"/>
+            <a:r>
+              <a:rPr lang="ja-JP" altLang="ja-JP" dirty="0"/>
+              <a:t>Tránh lỗi phổ biến khi so sánh chuỗi bằng ==</a:t>
+            </a:r>
+            <a:endParaRPr lang="en-US" altLang="ja-JP" dirty="0"/>
+          </a:p>
+          <a:p>
+            <a:pPr lvl="0"/>
+            <a:endParaRPr lang="ja-JP" altLang="ja-JP" dirty="0"/>
+          </a:p>
+        </p:txBody>
+      </p:sp>
+      <p:sp>
+        <p:nvSpPr>
+          <p:cNvPr id="4" name="Slide Number Placeholder 3">
+            <a:extLst>
+              <a:ext uri="{FF2B5EF4-FFF2-40B4-BE49-F238E27FC236}">
+                <a16:creationId xmlns:a16="http://schemas.microsoft.com/office/drawing/2014/main" id="{8B90CDCE-782D-8768-070A-3F0442C13A8A}"/>
+              </a:ext>
+            </a:extLst>
+          </p:cNvPr>
+          <p:cNvSpPr>
+            <a:spLocks noGrp="1"/>
+          </p:cNvSpPr>
+          <p:nvPr>
+            <p:ph type="sldNum" sz="quarter" idx="11"/>
+          </p:nvPr>
+        </p:nvSpPr>
+        <p:spPr/>
+        <p:txBody>
+          <a:bodyPr/>
+          <a:lstStyle/>
+          <a:p>
+            <a:pPr>
+              <a:defRPr/>
+            </a:pPr>
+            <a:r>
+              <a:rPr lang="en-US" altLang="ja-JP"/>
+              <a:t>Page:</a:t>
+            </a:r>
+            <a:r>
+              <a:rPr lang="ja-JP" altLang="en-US"/>
+              <a:t> </a:t>
+            </a:r>
+            <a:fld id="{DC07468E-517B-4E9D-8840-A4568A307980}" type="slidenum">
+              <a:rPr lang="en-US" altLang="ja-JP" smtClean="0"/>
+              <a:pPr>
+                <a:defRPr/>
+              </a:pPr>
+              <a:t>4</a:t>
+            </a:fld>
+            <a:endParaRPr lang="en-US" altLang="ja-JP"/>
+          </a:p>
+        </p:txBody>
+      </p:sp>
+    </p:spTree>
+    <p:extLst>
+      <p:ext uri="{BB962C8B-B14F-4D97-AF65-F5344CB8AC3E}">
+        <p14:creationId xmlns:p14="http://schemas.microsoft.com/office/powerpoint/2010/main" val="471393954"/>
+      </p:ext>
+    </p:extLst>
+  </p:cSld>
+  <p:clrMapOvr>
+    <a:masterClrMapping/>
+  </p:clrMapOvr>
+</p:sld>
+</file>
+
+<file path=ppt/slides/slide5.xml><?xml version="1.0" encoding="utf-8"?>
+<p:sld xmlns:a="http://schemas.openxmlformats.org/drawingml/2006/main" xmlns:r="http://schemas.openxmlformats.org/officeDocument/2006/relationships" xmlns:p="http://schemas.openxmlformats.org/presentationml/2006/main">
+  <p:cSld>
+    <p:spTree>
+      <p:nvGrpSpPr>
+        <p:cNvPr id="1" name=""/>
+        <p:cNvGrpSpPr/>
+        <p:nvPr/>
+      </p:nvGrpSpPr>
+      <p:grpSpPr>
+        <a:xfrm>
+          <a:off x="0" y="0"/>
+          <a:ext cx="0" cy="0"/>
+          <a:chOff x="0" y="0"/>
+          <a:chExt cx="0" cy="0"/>
+        </a:xfrm>
+      </p:grpSpPr>
+      <p:sp>
+        <p:nvSpPr>
+          <p:cNvPr id="2" name="Title 1">
+            <a:extLst>
+              <a:ext uri="{FF2B5EF4-FFF2-40B4-BE49-F238E27FC236}">
+                <a16:creationId xmlns:a16="http://schemas.microsoft.com/office/drawing/2014/main" id="{281054A8-CC90-51CD-14B0-C6741C70322B}"/>
+              </a:ext>
+            </a:extLst>
+          </p:cNvPr>
+          <p:cNvSpPr>
+            <a:spLocks noGrp="1"/>
+          </p:cNvSpPr>
+          <p:nvPr>
+            <p:ph type="title"/>
+          </p:nvPr>
+        </p:nvSpPr>
+        <p:spPr/>
+        <p:txBody>
+          <a:bodyPr>
+            <a:normAutofit fontScale="90000"/>
+          </a:bodyPr>
+          <a:lstStyle/>
+          <a:p>
+            <a:r>
+              <a:rPr lang="ja-JP" altLang="ja-JP" dirty="0"/>
+              <a:t>So sánh địa chỉ (==)</a:t>
+            </a:r>
+            <a:r>
+              <a:rPr lang="en-US" altLang="ja-JP" dirty="0"/>
+              <a:t> </a:t>
+            </a:r>
+            <a:r>
+              <a:rPr lang="en-US" altLang="ja-JP" dirty="0" err="1"/>
+              <a:t>và</a:t>
+            </a:r>
+            <a:r>
+              <a:rPr lang="en-US" altLang="ja-JP" dirty="0"/>
+              <a:t> So </a:t>
+            </a:r>
+            <a:r>
+              <a:rPr lang="en-US" altLang="ja-JP" dirty="0" err="1"/>
+              <a:t>sánh</a:t>
+            </a:r>
+            <a:r>
+              <a:rPr lang="en-US" altLang="ja-JP" dirty="0"/>
+              <a:t> </a:t>
+            </a:r>
+            <a:r>
+              <a:rPr lang="en-US" altLang="ja-JP" dirty="0" err="1"/>
+              <a:t>nội</a:t>
+            </a:r>
+            <a:r>
+              <a:rPr lang="en-US" altLang="ja-JP" dirty="0"/>
+              <a:t> dung (equals)</a:t>
+            </a:r>
+            <a:endParaRPr kumimoji="1" lang="ja-JP" altLang="en-US" dirty="0"/>
+          </a:p>
+        </p:txBody>
+      </p:sp>
+      <p:sp>
+        <p:nvSpPr>
+          <p:cNvPr id="3" name="Content Placeholder 2">
+            <a:extLst>
+              <a:ext uri="{FF2B5EF4-FFF2-40B4-BE49-F238E27FC236}">
+                <a16:creationId xmlns:a16="http://schemas.microsoft.com/office/drawing/2014/main" id="{5D3266D5-2F16-24A8-3A6A-CFE454C7F0C3}"/>
+              </a:ext>
+            </a:extLst>
+          </p:cNvPr>
+          <p:cNvSpPr>
+            <a:spLocks noGrp="1"/>
+          </p:cNvSpPr>
+          <p:nvPr>
+            <p:ph idx="1"/>
+          </p:nvPr>
+        </p:nvSpPr>
+        <p:spPr/>
+        <p:txBody>
+          <a:bodyPr/>
+          <a:lstStyle/>
+          <a:p>
+            <a:r>
+              <a:rPr lang="ja-JP" altLang="ja-JP" b="1" dirty="0"/>
+              <a:t>Ví dụ:</a:t>
+            </a:r>
+            <a:endParaRPr lang="ja-JP" altLang="ja-JP" dirty="0"/>
+          </a:p>
+          <a:p>
+            <a:pPr lvl="1"/>
+            <a:r>
+              <a:rPr lang="ja-JP" altLang="ja-JP" dirty="0"/>
+              <a:t>String a = "hello";</a:t>
+            </a:r>
+          </a:p>
+          <a:p>
+            <a:pPr lvl="1"/>
+            <a:r>
+              <a:rPr lang="ja-JP" altLang="ja-JP" dirty="0"/>
+              <a:t>String b = new String("hello");</a:t>
+            </a:r>
+            <a:endParaRPr lang="en-US" altLang="ja-JP" dirty="0"/>
+          </a:p>
+          <a:p>
+            <a:r>
+              <a:rPr lang="en-US" altLang="ja-JP" dirty="0"/>
+              <a:t>So </a:t>
+            </a:r>
+            <a:r>
+              <a:rPr lang="en-US" altLang="ja-JP" dirty="0" err="1"/>
+              <a:t>sánh</a:t>
+            </a:r>
+            <a:r>
+              <a:rPr lang="en-US" altLang="ja-JP" dirty="0"/>
+              <a:t> </a:t>
+            </a:r>
+            <a:r>
+              <a:rPr lang="en-US" altLang="ja-JP" dirty="0" err="1"/>
+              <a:t>địa</a:t>
+            </a:r>
+            <a:r>
+              <a:rPr lang="en-US" altLang="ja-JP" dirty="0"/>
+              <a:t> </a:t>
+            </a:r>
+            <a:r>
+              <a:rPr lang="en-US" altLang="ja-JP" dirty="0" err="1"/>
+              <a:t>chỉ</a:t>
+            </a:r>
+            <a:r>
+              <a:rPr lang="en-US" altLang="ja-JP" dirty="0"/>
+              <a:t> (==)</a:t>
+            </a:r>
+            <a:endParaRPr lang="ja-JP" altLang="ja-JP" dirty="0"/>
+          </a:p>
+          <a:p>
+            <a:pPr lvl="1"/>
+            <a:r>
+              <a:rPr lang="ja-JP" altLang="ja-JP" dirty="0"/>
+              <a:t>System.out.println(a == b); </a:t>
+            </a:r>
+            <a:r>
+              <a:rPr lang="en-US" altLang="ja-JP" dirty="0"/>
+              <a:t>//F</a:t>
+            </a:r>
+            <a:r>
+              <a:rPr kumimoji="1" lang="en-US" altLang="ja-JP" dirty="0">
+                <a:sym typeface="Wingdings" panose="05000000000000000000" pitchFamily="2" charset="2"/>
+              </a:rPr>
+              <a:t>alse</a:t>
+            </a:r>
+          </a:p>
+          <a:p>
+            <a:r>
+              <a:rPr lang="ja-JP" altLang="ja-JP" dirty="0"/>
+              <a:t>So sánh nội dung (equals())</a:t>
+            </a:r>
+          </a:p>
+          <a:p>
+            <a:pPr lvl="1"/>
+            <a:r>
+              <a:rPr lang="ja-JP" altLang="ja-JP" dirty="0"/>
+              <a:t>System.out.println(a.equals(b));  // </a:t>
+            </a:r>
+            <a:r>
+              <a:rPr lang="en-US" altLang="ja-JP" dirty="0"/>
+              <a:t>T</a:t>
+            </a:r>
+            <a:r>
+              <a:rPr lang="ja-JP" altLang="ja-JP" dirty="0"/>
+              <a:t>rue</a:t>
+            </a:r>
+            <a:endParaRPr lang="en-US" altLang="ja-JP" dirty="0"/>
+          </a:p>
+          <a:p>
+            <a:pPr marL="0" indent="0">
+              <a:buNone/>
+            </a:pPr>
+            <a:r>
+              <a:rPr lang="en-US" altLang="ja-JP" dirty="0">
+                <a:sym typeface="Wingdings" panose="05000000000000000000" pitchFamily="2" charset="2"/>
+              </a:rPr>
+              <a:t> </a:t>
+            </a:r>
+            <a:r>
+              <a:rPr lang="ja-JP" altLang="ja-JP" dirty="0"/>
+              <a:t>So sánh chuỗi → luôn dùng .equals() để so sánh nội dung/giá trị</a:t>
+            </a:r>
+          </a:p>
+          <a:p>
+            <a:pPr marL="0" indent="0">
+              <a:buNone/>
+            </a:pPr>
+            <a:endParaRPr kumimoji="1" lang="ja-JP" altLang="en-US" i="1" dirty="0"/>
+          </a:p>
+        </p:txBody>
+      </p:sp>
+      <p:sp>
+        <p:nvSpPr>
+          <p:cNvPr id="4" name="Slide Number Placeholder 3">
+            <a:extLst>
+              <a:ext uri="{FF2B5EF4-FFF2-40B4-BE49-F238E27FC236}">
+                <a16:creationId xmlns:a16="http://schemas.microsoft.com/office/drawing/2014/main" id="{24AC2CF0-D072-D2ED-981B-4304CDA517C4}"/>
+              </a:ext>
+            </a:extLst>
+          </p:cNvPr>
+          <p:cNvSpPr>
+            <a:spLocks noGrp="1"/>
+          </p:cNvSpPr>
+          <p:nvPr>
+            <p:ph type="sldNum" sz="quarter" idx="11"/>
+          </p:nvPr>
+        </p:nvSpPr>
+        <p:spPr/>
+        <p:txBody>
+          <a:bodyPr/>
+          <a:lstStyle/>
+          <a:p>
+            <a:pPr>
+              <a:defRPr/>
+            </a:pPr>
+            <a:r>
+              <a:rPr lang="en-US" altLang="ja-JP"/>
+              <a:t>Page:</a:t>
+            </a:r>
+            <a:r>
+              <a:rPr lang="ja-JP" altLang="en-US"/>
+              <a:t> </a:t>
+            </a:r>
+            <a:fld id="{DC07468E-517B-4E9D-8840-A4568A307980}" type="slidenum">
+              <a:rPr lang="en-US" altLang="ja-JP" smtClean="0"/>
+              <a:pPr>
+                <a:defRPr/>
+              </a:pPr>
+              <a:t>5</a:t>
+            </a:fld>
+            <a:endParaRPr lang="en-US" altLang="ja-JP"/>
+          </a:p>
+        </p:txBody>
+      </p:sp>
+    </p:spTree>
+    <p:extLst>
+      <p:ext uri="{BB962C8B-B14F-4D97-AF65-F5344CB8AC3E}">
+        <p14:creationId xmlns:p14="http://schemas.microsoft.com/office/powerpoint/2010/main" val="930376670"/>
+      </p:ext>
+    </p:extLst>
+  </p:cSld>
+  <p:clrMapOvr>
+    <a:masterClrMapping/>
+  </p:clrMapOvr>
+</p:sld>
+</file>
+
+<file path=ppt/slides/slide6.xml><?xml version="1.0" encoding="utf-8"?>
+<p:sld xmlns:a="http://schemas.openxmlformats.org/drawingml/2006/main" xmlns:r="http://schemas.openxmlformats.org/officeDocument/2006/relationships" xmlns:p="http://schemas.openxmlformats.org/presentationml/2006/main">
+  <p:cSld>
+    <p:spTree>
+      <p:nvGrpSpPr>
+        <p:cNvPr id="1" name=""/>
+        <p:cNvGrpSpPr/>
+        <p:nvPr/>
+      </p:nvGrpSpPr>
+      <p:grpSpPr>
+        <a:xfrm>
+          <a:off x="0" y="0"/>
+          <a:ext cx="0" cy="0"/>
+          <a:chOff x="0" y="0"/>
+          <a:chExt cx="0" cy="0"/>
+        </a:xfrm>
+      </p:grpSpPr>
+      <p:sp>
+        <p:nvSpPr>
+          <p:cNvPr id="2" name="Title 1">
+            <a:extLst>
+              <a:ext uri="{FF2B5EF4-FFF2-40B4-BE49-F238E27FC236}">
+                <a16:creationId xmlns:a16="http://schemas.microsoft.com/office/drawing/2014/main" id="{EEEA0BB4-BC0F-92CA-8AA8-E65010332384}"/>
+              </a:ext>
+            </a:extLst>
+          </p:cNvPr>
+          <p:cNvSpPr>
+            <a:spLocks noGrp="1"/>
+          </p:cNvSpPr>
+          <p:nvPr>
+            <p:ph type="title"/>
+          </p:nvPr>
+        </p:nvSpPr>
+        <p:spPr/>
+        <p:txBody>
+          <a:bodyPr>
+            <a:normAutofit fontScale="90000"/>
+          </a:bodyPr>
+          <a:lstStyle/>
+          <a:p>
+            <a:r>
+              <a:rPr lang="ja-JP" altLang="ja-JP" dirty="0"/>
+              <a:t>Xử lý chuỗi hiệu quả với StringBuilder &amp; StringBuffer</a:t>
+            </a:r>
+            <a:endParaRPr kumimoji="1" lang="ja-JP" altLang="en-US" dirty="0"/>
+          </a:p>
+        </p:txBody>
+      </p:sp>
+      <p:sp>
+        <p:nvSpPr>
+          <p:cNvPr id="3" name="Content Placeholder 2">
+            <a:extLst>
+              <a:ext uri="{FF2B5EF4-FFF2-40B4-BE49-F238E27FC236}">
+                <a16:creationId xmlns:a16="http://schemas.microsoft.com/office/drawing/2014/main" id="{F8E85FE8-AAE5-F131-EB76-BAD261CD0649}"/>
+              </a:ext>
+            </a:extLst>
+          </p:cNvPr>
+          <p:cNvSpPr>
+            <a:spLocks noGrp="1"/>
+          </p:cNvSpPr>
+          <p:nvPr>
+            <p:ph idx="1"/>
+          </p:nvPr>
+        </p:nvSpPr>
+        <p:spPr/>
+        <p:txBody>
+          <a:bodyPr>
+            <a:normAutofit fontScale="70000" lnSpcReduction="20000"/>
+          </a:bodyPr>
+          <a:lstStyle/>
+          <a:p>
+            <a:r>
+              <a:rPr lang="ja-JP" altLang="ja-JP" dirty="0"/>
+              <a:t>String là immutable (Không thay đổi)</a:t>
+            </a:r>
+          </a:p>
+          <a:p>
+            <a:pPr lvl="1"/>
+            <a:r>
+              <a:rPr lang="ja-JP" altLang="ja-JP" b="1" dirty="0"/>
+              <a:t>Trong Java, immutable nghĩa là không thể thay đổi sau khi được tạo ra.</a:t>
+            </a:r>
+            <a:endParaRPr lang="ja-JP" altLang="ja-JP" dirty="0"/>
+          </a:p>
+          <a:p>
+            <a:r>
+              <a:rPr lang="ja-JP" altLang="ja-JP" dirty="0"/>
+              <a:t>Khi thay đổi chuỗi String, Java không chỉnh sửa nội dung gốc, mà tạo ra một đối tượng chuỗi mới.</a:t>
+            </a:r>
+          </a:p>
+          <a:p>
+            <a:pPr marL="0" indent="0">
+              <a:buNone/>
+            </a:pPr>
+            <a:r>
+              <a:rPr lang="ja-JP" altLang="ja-JP" b="1" dirty="0"/>
+              <a:t>Ví dụ:</a:t>
+            </a:r>
+            <a:endParaRPr lang="ja-JP" altLang="ja-JP" dirty="0"/>
+          </a:p>
+          <a:p>
+            <a:r>
+              <a:rPr lang="ja-JP" altLang="ja-JP" dirty="0"/>
+              <a:t>String s = "Hello";</a:t>
+            </a:r>
+          </a:p>
+          <a:p>
+            <a:r>
+              <a:rPr lang="ja-JP" altLang="ja-JP" dirty="0"/>
+              <a:t>s = s + " World";</a:t>
+            </a:r>
+          </a:p>
+          <a:p>
+            <a:r>
+              <a:rPr lang="ja-JP" altLang="ja-JP" dirty="0"/>
+              <a:t>System.out.println(s);  // Hello World</a:t>
+            </a:r>
+          </a:p>
+          <a:p>
+            <a:pPr marL="0" indent="0">
+              <a:buNone/>
+            </a:pPr>
+            <a:r>
+              <a:rPr lang="ja-JP" altLang="ja-JP" dirty="0"/>
+              <a:t> </a:t>
+            </a:r>
+          </a:p>
+          <a:p>
+            <a:r>
+              <a:rPr lang="en-US" altLang="ja-JP" b="1" dirty="0" err="1"/>
+              <a:t>Giải</a:t>
+            </a:r>
+            <a:r>
+              <a:rPr lang="en-US" altLang="ja-JP" b="1" dirty="0"/>
+              <a:t> </a:t>
+            </a:r>
+            <a:r>
+              <a:rPr lang="en-US" altLang="ja-JP" b="1" dirty="0" err="1"/>
+              <a:t>thích</a:t>
+            </a:r>
+            <a:r>
+              <a:rPr lang="en-US" altLang="ja-JP" b="1" dirty="0"/>
+              <a:t>: </a:t>
+            </a:r>
+            <a:endParaRPr lang="ja-JP" altLang="ja-JP" dirty="0"/>
+          </a:p>
+          <a:p>
+            <a:r>
+              <a:rPr lang="ja-JP" altLang="ja-JP" dirty="0"/>
+              <a:t>Ban đầu s tham chiếu đến chuỗi "Hello". </a:t>
+            </a:r>
+          </a:p>
+          <a:p>
+            <a:pPr lvl="0"/>
+            <a:r>
+              <a:rPr lang="ja-JP" altLang="ja-JP" dirty="0"/>
+              <a:t>Khi nối " World" bằng s + " World", Java tạo một đối tượng chuỗi mới chứa "Hello World". </a:t>
+            </a:r>
+          </a:p>
+          <a:p>
+            <a:pPr lvl="0"/>
+            <a:r>
+              <a:rPr lang="ja-JP" altLang="ja-JP" dirty="0"/>
+              <a:t>Biến s không thay đổi nội dung cũ, mà trỏ sang đối tượng mới.</a:t>
+            </a:r>
+            <a:endParaRPr lang="en-US" altLang="ja-JP" dirty="0"/>
+          </a:p>
+          <a:p>
+            <a:pPr lvl="0"/>
+            <a:r>
+              <a:rPr lang="ja-JP" altLang="ja-JP" dirty="0"/>
+              <a:t>Đối tượng "Hello" vẫn tồn tại trong bộ nhớ (chờ GC thu dọn)</a:t>
+            </a:r>
+          </a:p>
+          <a:p>
+            <a:endParaRPr kumimoji="1" lang="ja-JP" altLang="en-US" dirty="0"/>
+          </a:p>
+        </p:txBody>
+      </p:sp>
+      <p:sp>
+        <p:nvSpPr>
+          <p:cNvPr id="4" name="Slide Number Placeholder 3">
+            <a:extLst>
+              <a:ext uri="{FF2B5EF4-FFF2-40B4-BE49-F238E27FC236}">
+                <a16:creationId xmlns:a16="http://schemas.microsoft.com/office/drawing/2014/main" id="{5A952053-8200-4DA8-09A9-7BE82A588828}"/>
+              </a:ext>
+            </a:extLst>
+          </p:cNvPr>
+          <p:cNvSpPr>
+            <a:spLocks noGrp="1"/>
+          </p:cNvSpPr>
+          <p:nvPr>
+            <p:ph type="sldNum" sz="quarter" idx="11"/>
+          </p:nvPr>
+        </p:nvSpPr>
+        <p:spPr/>
+        <p:txBody>
+          <a:bodyPr/>
+          <a:lstStyle/>
+          <a:p>
+            <a:pPr>
+              <a:defRPr/>
+            </a:pPr>
+            <a:r>
+              <a:rPr lang="en-US" altLang="ja-JP"/>
+              <a:t>Page:</a:t>
+            </a:r>
+            <a:r>
+              <a:rPr lang="ja-JP" altLang="en-US"/>
+              <a:t> </a:t>
+            </a:r>
+            <a:fld id="{DC07468E-517B-4E9D-8840-A4568A307980}" type="slidenum">
+              <a:rPr lang="en-US" altLang="ja-JP" smtClean="0"/>
+              <a:pPr>
+                <a:defRPr/>
+              </a:pPr>
+              <a:t>6</a:t>
+            </a:fld>
+            <a:endParaRPr lang="en-US" altLang="ja-JP"/>
+          </a:p>
+        </p:txBody>
+      </p:sp>
+    </p:spTree>
+    <p:extLst>
+      <p:ext uri="{BB962C8B-B14F-4D97-AF65-F5344CB8AC3E}">
+        <p14:creationId xmlns:p14="http://schemas.microsoft.com/office/powerpoint/2010/main" val="3034115220"/>
+      </p:ext>
+    </p:extLst>
+  </p:cSld>
+  <p:clrMapOvr>
+    <a:masterClrMapping/>
+  </p:clrMapOvr>
+</p:sld>
+</file>
+
+<file path=ppt/slides/slide7.xml><?xml version="1.0" encoding="utf-8"?>
+<p:sld xmlns:a="http://schemas.openxmlformats.org/drawingml/2006/main" xmlns:r="http://schemas.openxmlformats.org/officeDocument/2006/relationships" xmlns:p="http://schemas.openxmlformats.org/presentationml/2006/main">
+  <p:cSld>
+    <p:spTree>
+      <p:nvGrpSpPr>
+        <p:cNvPr id="1" name=""/>
+        <p:cNvGrpSpPr/>
+        <p:nvPr/>
+      </p:nvGrpSpPr>
+      <p:grpSpPr>
+        <a:xfrm>
+          <a:off x="0" y="0"/>
+          <a:ext cx="0" cy="0"/>
+          <a:chOff x="0" y="0"/>
+          <a:chExt cx="0" cy="0"/>
+        </a:xfrm>
+      </p:grpSpPr>
+      <p:sp>
+        <p:nvSpPr>
+          <p:cNvPr id="2" name="Title 1">
+            <a:extLst>
+              <a:ext uri="{FF2B5EF4-FFF2-40B4-BE49-F238E27FC236}">
+                <a16:creationId xmlns:a16="http://schemas.microsoft.com/office/drawing/2014/main" id="{253705BA-2A93-3300-387F-DACFE943ABBC}"/>
+              </a:ext>
+            </a:extLst>
+          </p:cNvPr>
+          <p:cNvSpPr>
+            <a:spLocks noGrp="1"/>
+          </p:cNvSpPr>
+          <p:nvPr>
+            <p:ph type="title"/>
+          </p:nvPr>
+        </p:nvSpPr>
+        <p:spPr/>
+        <p:txBody>
+          <a:bodyPr>
+            <a:normAutofit fontScale="90000"/>
+          </a:bodyPr>
+          <a:lstStyle/>
+          <a:p>
+            <a:r>
+              <a:rPr lang="en-US" altLang="ja-JP" b="1" dirty="0"/>
+              <a:t>D</a:t>
+            </a:r>
+            <a:r>
+              <a:rPr lang="ja-JP" altLang="ja-JP" b="1" dirty="0"/>
+              <a:t>ùng String trong vòng lặp nối chuỗi:</a:t>
+            </a:r>
+            <a:endParaRPr kumimoji="1" lang="ja-JP" altLang="en-US" dirty="0"/>
+          </a:p>
+        </p:txBody>
+      </p:sp>
+      <p:sp>
+        <p:nvSpPr>
+          <p:cNvPr id="3" name="Content Placeholder 2">
+            <a:extLst>
+              <a:ext uri="{FF2B5EF4-FFF2-40B4-BE49-F238E27FC236}">
+                <a16:creationId xmlns:a16="http://schemas.microsoft.com/office/drawing/2014/main" id="{1D9413F7-716E-D8D8-009E-23A71C985DA9}"/>
+              </a:ext>
+            </a:extLst>
+          </p:cNvPr>
+          <p:cNvSpPr>
+            <a:spLocks noGrp="1"/>
+          </p:cNvSpPr>
+          <p:nvPr>
+            <p:ph idx="1"/>
+          </p:nvPr>
+        </p:nvSpPr>
+        <p:spPr/>
+        <p:txBody>
+          <a:bodyPr/>
+          <a:lstStyle/>
+          <a:p>
+            <a:pPr marL="0" indent="0">
+              <a:buNone/>
+            </a:pPr>
+            <a:r>
+              <a:rPr lang="en-US" altLang="ja-JP" dirty="0" err="1"/>
+              <a:t>Ví</a:t>
+            </a:r>
+            <a:r>
+              <a:rPr lang="en-US" altLang="ja-JP" dirty="0"/>
+              <a:t> </a:t>
+            </a:r>
+            <a:r>
+              <a:rPr lang="en-US" altLang="ja-JP" dirty="0" err="1"/>
+              <a:t>dụ</a:t>
+            </a:r>
+            <a:r>
+              <a:rPr lang="en-US" altLang="ja-JP" dirty="0"/>
+              <a:t>:</a:t>
+            </a:r>
+          </a:p>
+          <a:p>
+            <a:pPr marL="0" indent="0">
+              <a:buNone/>
+            </a:pPr>
+            <a:r>
+              <a:rPr lang="ja-JP" altLang="ja-JP" i="1" dirty="0"/>
+              <a:t>String result = "";</a:t>
+            </a:r>
+          </a:p>
+          <a:p>
+            <a:pPr marL="0" indent="0">
+              <a:buNone/>
+            </a:pPr>
+            <a:r>
+              <a:rPr lang="ja-JP" altLang="ja-JP" i="1" dirty="0"/>
+              <a:t>for (int i = 0; i &lt; 1000; i++) {</a:t>
+            </a:r>
+          </a:p>
+          <a:p>
+            <a:pPr marL="0" indent="0">
+              <a:buNone/>
+            </a:pPr>
+            <a:r>
+              <a:rPr lang="en-US" altLang="ja-JP" i="1" dirty="0"/>
+              <a:t>	</a:t>
+            </a:r>
+            <a:r>
+              <a:rPr lang="ja-JP" altLang="ja-JP" i="1" dirty="0"/>
+              <a:t>result = result + i;  </a:t>
+            </a:r>
+          </a:p>
+          <a:p>
+            <a:pPr marL="0" indent="0">
+              <a:buNone/>
+            </a:pPr>
+            <a:r>
+              <a:rPr lang="ja-JP" altLang="ja-JP" i="1" dirty="0"/>
+              <a:t>}</a:t>
+            </a:r>
+            <a:endParaRPr lang="en-US" altLang="ja-JP" i="1" dirty="0"/>
+          </a:p>
+          <a:p>
+            <a:pPr marL="0" indent="0">
+              <a:buNone/>
+            </a:pPr>
+            <a:r>
+              <a:rPr lang="en-US" altLang="ja-JP" dirty="0">
+                <a:sym typeface="Wingdings" panose="05000000000000000000" pitchFamily="2" charset="2"/>
+              </a:rPr>
+              <a:t></a:t>
+            </a:r>
+            <a:r>
+              <a:rPr lang="ja-JP" altLang="ja-JP" dirty="0"/>
+              <a:t>mỗi lần + tạo một đối tượng mới</a:t>
+            </a:r>
+            <a:r>
+              <a:rPr lang="en-US" altLang="ja-JP" dirty="0"/>
+              <a:t>, </a:t>
+            </a:r>
+          </a:p>
+          <a:p>
+            <a:pPr marL="0" indent="0">
+              <a:buNone/>
+            </a:pPr>
+            <a:r>
+              <a:rPr lang="en-US" altLang="ja-JP" dirty="0">
+                <a:sym typeface="Wingdings" panose="05000000000000000000" pitchFamily="2" charset="2"/>
+              </a:rPr>
+              <a:t></a:t>
+            </a:r>
+            <a:r>
+              <a:rPr lang="en-US" altLang="ja-JP" dirty="0"/>
+              <a:t>v</a:t>
+            </a:r>
+            <a:r>
+              <a:rPr lang="ja-JP" altLang="ja-JP" dirty="0"/>
+              <a:t>ới 1000 vòng lặp Java tạo ra hàng trăm đối tượng String mới </a:t>
+            </a:r>
+            <a:endParaRPr lang="en-US" altLang="ja-JP" dirty="0"/>
+          </a:p>
+          <a:p>
+            <a:pPr marL="0" indent="0">
+              <a:buNone/>
+            </a:pPr>
+            <a:r>
+              <a:rPr lang="en-US" altLang="ja-JP" dirty="0">
+                <a:sym typeface="Wingdings" panose="05000000000000000000" pitchFamily="2" charset="2"/>
+              </a:rPr>
+              <a:t> </a:t>
+            </a:r>
+            <a:r>
+              <a:rPr lang="ja-JP" altLang="ja-JP" dirty="0"/>
+              <a:t>tốn RAM và </a:t>
+            </a:r>
+            <a:r>
+              <a:rPr lang="en-US" altLang="ja-JP" dirty="0" err="1"/>
+              <a:t>gây</a:t>
+            </a:r>
+            <a:r>
+              <a:rPr lang="en-US" altLang="ja-JP" dirty="0"/>
+              <a:t> </a:t>
+            </a:r>
+            <a:r>
+              <a:rPr lang="en-US" altLang="ja-JP" dirty="0" err="1"/>
+              <a:t>ra</a:t>
+            </a:r>
+            <a:r>
+              <a:rPr lang="en-US" altLang="ja-JP" dirty="0"/>
+              <a:t> </a:t>
+            </a:r>
+            <a:r>
+              <a:rPr lang="en-US" altLang="ja-JP" dirty="0" err="1"/>
+              <a:t>chương</a:t>
+            </a:r>
+            <a:r>
+              <a:rPr lang="en-US" altLang="ja-JP" dirty="0"/>
+              <a:t> </a:t>
+            </a:r>
+            <a:r>
+              <a:rPr lang="en-US" altLang="ja-JP" dirty="0" err="1"/>
+              <a:t>trình</a:t>
+            </a:r>
+            <a:r>
+              <a:rPr lang="en-US" altLang="ja-JP" dirty="0"/>
+              <a:t> </a:t>
+            </a:r>
+            <a:r>
+              <a:rPr lang="ja-JP" altLang="ja-JP" dirty="0"/>
+              <a:t>chậm</a:t>
+            </a:r>
+          </a:p>
+        </p:txBody>
+      </p:sp>
+      <p:sp>
+        <p:nvSpPr>
+          <p:cNvPr id="4" name="Slide Number Placeholder 3">
+            <a:extLst>
+              <a:ext uri="{FF2B5EF4-FFF2-40B4-BE49-F238E27FC236}">
+                <a16:creationId xmlns:a16="http://schemas.microsoft.com/office/drawing/2014/main" id="{15F287E3-ED47-AA48-B4C6-E3E178947065}"/>
+              </a:ext>
+            </a:extLst>
+          </p:cNvPr>
+          <p:cNvSpPr>
+            <a:spLocks noGrp="1"/>
+          </p:cNvSpPr>
+          <p:nvPr>
+            <p:ph type="sldNum" sz="quarter" idx="11"/>
+          </p:nvPr>
+        </p:nvSpPr>
+        <p:spPr/>
+        <p:txBody>
+          <a:bodyPr/>
+          <a:lstStyle/>
+          <a:p>
+            <a:pPr>
+              <a:defRPr/>
+            </a:pPr>
+            <a:r>
+              <a:rPr lang="en-US" altLang="ja-JP"/>
+              <a:t>Page:</a:t>
+            </a:r>
+            <a:r>
+              <a:rPr lang="ja-JP" altLang="en-US"/>
+              <a:t> </a:t>
+            </a:r>
+            <a:fld id="{DC07468E-517B-4E9D-8840-A4568A307980}" type="slidenum">
+              <a:rPr lang="en-US" altLang="ja-JP" smtClean="0"/>
+              <a:pPr>
+                <a:defRPr/>
+              </a:pPr>
+              <a:t>7</a:t>
+            </a:fld>
+            <a:endParaRPr lang="en-US" altLang="ja-JP"/>
+          </a:p>
+        </p:txBody>
+      </p:sp>
+    </p:spTree>
+    <p:extLst>
+      <p:ext uri="{BB962C8B-B14F-4D97-AF65-F5344CB8AC3E}">
+        <p14:creationId xmlns:p14="http://schemas.microsoft.com/office/powerpoint/2010/main" val="2801369772"/>
+      </p:ext>
+    </p:extLst>
+  </p:cSld>
+  <p:clrMapOvr>
+    <a:masterClrMapping/>
+  </p:clrMapOvr>
+</p:sld>
+</file>
+
+<file path=ppt/slides/slide8.xml><?xml version="1.0" encoding="utf-8"?>
+<p:sld xmlns:a="http://schemas.openxmlformats.org/drawingml/2006/main" xmlns:r="http://schemas.openxmlformats.org/officeDocument/2006/relationships" xmlns:p="http://schemas.openxmlformats.org/presentationml/2006/main">
+  <p:cSld>
+    <p:spTree>
+      <p:nvGrpSpPr>
+        <p:cNvPr id="1" name=""/>
+        <p:cNvGrpSpPr/>
+        <p:nvPr/>
+      </p:nvGrpSpPr>
+      <p:grpSpPr>
+        <a:xfrm>
+          <a:off x="0" y="0"/>
+          <a:ext cx="0" cy="0"/>
+          <a:chOff x="0" y="0"/>
+          <a:chExt cx="0" cy="0"/>
+        </a:xfrm>
+      </p:grpSpPr>
+      <p:sp>
+        <p:nvSpPr>
+          <p:cNvPr id="2" name="Title 1">
+            <a:extLst>
+              <a:ext uri="{FF2B5EF4-FFF2-40B4-BE49-F238E27FC236}">
+                <a16:creationId xmlns:a16="http://schemas.microsoft.com/office/drawing/2014/main" id="{4E01E5CC-D156-B68B-ECF1-33C48E260650}"/>
+              </a:ext>
+            </a:extLst>
+          </p:cNvPr>
+          <p:cNvSpPr>
+            <a:spLocks noGrp="1"/>
+          </p:cNvSpPr>
+          <p:nvPr>
+            <p:ph type="title"/>
+          </p:nvPr>
+        </p:nvSpPr>
+        <p:spPr/>
+        <p:txBody>
+          <a:bodyPr>
+            <a:normAutofit fontScale="90000"/>
+          </a:bodyPr>
+          <a:lstStyle/>
+          <a:p>
+            <a:r>
+              <a:rPr lang="ja-JP" altLang="ja-JP" dirty="0"/>
+              <a:t>StringBuild</a:t>
+            </a:r>
+            <a:r>
+              <a:rPr lang="ja-JP" altLang="ja-JP"/>
+              <a:t>er</a:t>
+            </a:r>
+            <a:endParaRPr kumimoji="1" lang="ja-JP" altLang="en-US" dirty="0"/>
+          </a:p>
+        </p:txBody>
+      </p:sp>
+      <p:sp>
+        <p:nvSpPr>
+          <p:cNvPr id="3" name="Content Placeholder 2">
+            <a:extLst>
+              <a:ext uri="{FF2B5EF4-FFF2-40B4-BE49-F238E27FC236}">
+                <a16:creationId xmlns:a16="http://schemas.microsoft.com/office/drawing/2014/main" id="{B322581B-2C73-B99B-58E2-7BE00870E5F7}"/>
+              </a:ext>
+            </a:extLst>
+          </p:cNvPr>
+          <p:cNvSpPr>
+            <a:spLocks noGrp="1"/>
+          </p:cNvSpPr>
+          <p:nvPr>
+            <p:ph idx="1"/>
+          </p:nvPr>
+        </p:nvSpPr>
+        <p:spPr/>
+        <p:txBody>
+          <a:bodyPr>
+            <a:normAutofit/>
+          </a:bodyPr>
+          <a:lstStyle/>
+          <a:p>
+            <a:r>
+              <a:rPr lang="ja-JP" altLang="ja-JP" dirty="0"/>
+              <a:t>Cả hai đều là lớp hỗ trợ thao tác với chuỗi có thể thay đổi (mutable), nhằm giải quyết hạn chế của lớp String (immutable).</a:t>
+            </a:r>
+          </a:p>
+          <a:p>
+            <a:r>
+              <a:rPr lang="ja-JP" altLang="ja-JP" dirty="0"/>
+              <a:t>Nên dùng khi:</a:t>
+            </a:r>
+          </a:p>
+          <a:p>
+            <a:pPr lvl="0"/>
+            <a:r>
+              <a:rPr lang="ja-JP" altLang="ja-JP" dirty="0"/>
+              <a:t>Bạn cần </a:t>
+            </a:r>
+            <a:r>
+              <a:rPr lang="ja-JP" altLang="ja-JP" b="1" dirty="0"/>
+              <a:t>nối chuỗi nhiều lần</a:t>
+            </a:r>
+            <a:r>
+              <a:rPr lang="ja-JP" altLang="ja-JP" dirty="0"/>
+              <a:t> (trong vòng lặp, xử lý văn bản).</a:t>
+            </a:r>
+          </a:p>
+          <a:p>
+            <a:pPr lvl="0"/>
+            <a:r>
+              <a:rPr lang="ja-JP" altLang="ja-JP" dirty="0"/>
+              <a:t>Muốn tăng hiệu suất và </a:t>
+            </a:r>
+            <a:r>
+              <a:rPr lang="ja-JP" altLang="ja-JP" b="1" dirty="0"/>
+              <a:t>tiết kiệm bộ nhớ</a:t>
+            </a:r>
+            <a:r>
+              <a:rPr lang="ja-JP" altLang="ja-JP" dirty="0"/>
+              <a:t> hơn so với dùng String. </a:t>
+            </a:r>
+          </a:p>
+          <a:p>
+            <a:r>
+              <a:rPr lang="ja-JP" altLang="ja-JP" dirty="0"/>
+              <a:t>StringBuilder sb = new StringBuilder("Hello");</a:t>
+            </a:r>
+          </a:p>
+          <a:p>
+            <a:endParaRPr kumimoji="1" lang="ja-JP" altLang="en-US" dirty="0"/>
+          </a:p>
+        </p:txBody>
+      </p:sp>
+      <p:sp>
+        <p:nvSpPr>
+          <p:cNvPr id="4" name="Slide Number Placeholder 3">
+            <a:extLst>
+              <a:ext uri="{FF2B5EF4-FFF2-40B4-BE49-F238E27FC236}">
+                <a16:creationId xmlns:a16="http://schemas.microsoft.com/office/drawing/2014/main" id="{A749C13C-18BD-1084-A93A-172BAD8E9024}"/>
+              </a:ext>
+            </a:extLst>
+          </p:cNvPr>
+          <p:cNvSpPr>
+            <a:spLocks noGrp="1"/>
+          </p:cNvSpPr>
+          <p:nvPr>
+            <p:ph type="sldNum" sz="quarter" idx="11"/>
+          </p:nvPr>
+        </p:nvSpPr>
+        <p:spPr/>
+        <p:txBody>
+          <a:bodyPr/>
+          <a:lstStyle/>
+          <a:p>
+            <a:pPr>
+              <a:defRPr/>
+            </a:pPr>
+            <a:r>
+              <a:rPr lang="en-US" altLang="ja-JP"/>
+              <a:t>Page:</a:t>
+            </a:r>
+            <a:r>
+              <a:rPr lang="ja-JP" altLang="en-US"/>
+              <a:t> </a:t>
+            </a:r>
+            <a:fld id="{DC07468E-517B-4E9D-8840-A4568A307980}" type="slidenum">
+              <a:rPr lang="en-US" altLang="ja-JP" smtClean="0"/>
+              <a:pPr>
+                <a:defRPr/>
+              </a:pPr>
+              <a:t>8</a:t>
+            </a:fld>
+            <a:endParaRPr lang="en-US" altLang="ja-JP"/>
+          </a:p>
+        </p:txBody>
+      </p:sp>
+    </p:spTree>
+    <p:extLst>
+      <p:ext uri="{BB962C8B-B14F-4D97-AF65-F5344CB8AC3E}">
+        <p14:creationId xmlns:p14="http://schemas.microsoft.com/office/powerpoint/2010/main" val="1441975078"/>
+      </p:ext>
+    </p:extLst>
+  </p:cSld>
+  <p:clrMapOvr>
+    <a:masterClrMapping/>
+  </p:clrMapOvr>
+</p:sld>
+</file>
+
+<file path=ppt/slides/slide9.xml><?xml version="1.0" encoding="utf-8"?>
+<p:sld xmlns:a="http://schemas.openxmlformats.org/drawingml/2006/main" xmlns:r="http://schemas.openxmlformats.org/officeDocument/2006/relationships" xmlns:p="http://schemas.openxmlformats.org/presentationml/2006/main">
+  <p:cSld>
+    <p:spTree>
+      <p:nvGrpSpPr>
+        <p:cNvPr id="1" name=""/>
+        <p:cNvGrpSpPr/>
+        <p:nvPr/>
+      </p:nvGrpSpPr>
+      <p:grpSpPr>
+        <a:xfrm>
+          <a:off x="0" y="0"/>
+          <a:ext cx="0" cy="0"/>
+          <a:chOff x="0" y="0"/>
+          <a:chExt cx="0" cy="0"/>
+        </a:xfrm>
+      </p:grpSpPr>
+      <p:sp>
+        <p:nvSpPr>
+          <p:cNvPr id="2" name="Title 1">
+            <a:extLst>
+              <a:ext uri="{FF2B5EF4-FFF2-40B4-BE49-F238E27FC236}">
+                <a16:creationId xmlns:a16="http://schemas.microsoft.com/office/drawing/2014/main" id="{D366ADB7-0D11-4253-9B71-544E7403D08E}"/>
+              </a:ext>
+            </a:extLst>
+          </p:cNvPr>
+          <p:cNvSpPr>
+            <a:spLocks noGrp="1"/>
+          </p:cNvSpPr>
+          <p:nvPr>
+            <p:ph type="title"/>
+          </p:nvPr>
+        </p:nvSpPr>
+        <p:spPr/>
+        <p:txBody>
+          <a:bodyPr>
+            <a:normAutofit fontScale="90000"/>
+          </a:bodyPr>
+          <a:lstStyle/>
+          <a:p>
+            <a:pPr>
+              <a:lnSpc>
+                <a:spcPct val="150000"/>
+              </a:lnSpc>
+            </a:pPr>
+            <a:r>
+              <a:rPr lang="ja-JP" altLang="ja-JP" b="1" dirty="0">
+                <a:latin typeface="Arial" panose="020B0604020202020204" pitchFamily="34" charset="0"/>
+                <a:ea typeface="Andika"/>
+                <a:cs typeface="Andika"/>
+              </a:rPr>
+              <a:t>Các phương thức thường dùng:</a:t>
+            </a:r>
+            <a:endParaRPr kumimoji="1" lang="ja-JP" altLang="en-US" dirty="0"/>
+          </a:p>
+        </p:txBody>
+      </p:sp>
+      <p:graphicFrame>
+        <p:nvGraphicFramePr>
+          <p:cNvPr id="5" name="Content Placeholder 4">
+            <a:extLst>
+              <a:ext uri="{FF2B5EF4-FFF2-40B4-BE49-F238E27FC236}">
+                <a16:creationId xmlns:a16="http://schemas.microsoft.com/office/drawing/2014/main" id="{EB4F3A90-3B4E-AA50-25BC-60FF42AC7DDC}"/>
+              </a:ext>
+            </a:extLst>
+          </p:cNvPr>
+          <p:cNvGraphicFramePr>
+            <a:graphicFrameLocks noGrp="1"/>
+          </p:cNvGraphicFramePr>
+          <p:nvPr>
+            <p:ph idx="1"/>
+            <p:extLst>
+              <p:ext uri="{D42A27DB-BD31-4B8C-83A1-F6EECF244321}">
+                <p14:modId xmlns:p14="http://schemas.microsoft.com/office/powerpoint/2010/main" val="3473198115"/>
+              </p:ext>
+            </p:extLst>
+          </p:nvPr>
+        </p:nvGraphicFramePr>
+        <p:xfrm>
+          <a:off x="533400" y="1470766"/>
+          <a:ext cx="8915400" cy="2186832"/>
+        </p:xfrm>
+        <a:graphic>
+          <a:graphicData uri="http://schemas.openxmlformats.org/drawingml/2006/table">
+            <a:tbl>
+              <a:tblPr>
+                <a:tableStyleId>{69CF1AB2-1976-4502-BF36-3FF5EA218861}</a:tableStyleId>
+              </a:tblPr>
+              <a:tblGrid>
+                <a:gridCol w="2971800">
+                  <a:extLst>
+                    <a:ext uri="{9D8B030D-6E8A-4147-A177-3AD203B41FA5}">
+                      <a16:colId xmlns:a16="http://schemas.microsoft.com/office/drawing/2014/main" val="2368831772"/>
+                    </a:ext>
+                  </a:extLst>
+                </a:gridCol>
+                <a:gridCol w="2971800">
+                  <a:extLst>
+                    <a:ext uri="{9D8B030D-6E8A-4147-A177-3AD203B41FA5}">
+                      <a16:colId xmlns:a16="http://schemas.microsoft.com/office/drawing/2014/main" val="4058703184"/>
+                    </a:ext>
+                  </a:extLst>
+                </a:gridCol>
+                <a:gridCol w="2971800">
+                  <a:extLst>
+                    <a:ext uri="{9D8B030D-6E8A-4147-A177-3AD203B41FA5}">
+                      <a16:colId xmlns:a16="http://schemas.microsoft.com/office/drawing/2014/main" val="365926868"/>
+                    </a:ext>
+                  </a:extLst>
+                </a:gridCol>
+              </a:tblGrid>
+              <a:tr h="364472">
+                <a:tc>
+                  <a:txBody>
+                    <a:bodyPr/>
+                    <a:lstStyle/>
+                    <a:p>
+                      <a:pPr algn="ctr">
+                        <a:lnSpc>
+                          <a:spcPct val="115000"/>
+                        </a:lnSpc>
+                        <a:buNone/>
+                      </a:pPr>
+                      <a:r>
+                        <a:rPr lang="ja-JP" sz="1200" b="1" kern="100" dirty="0">
+                          <a:effectLst/>
+                        </a:rPr>
+                        <a:t>Phương thức</a:t>
+                      </a:r>
+                      <a:endParaRPr lang="ja-JP" sz="1100" b="1" kern="100" dirty="0">
+                        <a:effectLst/>
+                        <a:latin typeface="Arial" panose="020B0604020202020204" pitchFamily="34" charset="0"/>
+                        <a:ea typeface="游明朝" panose="02020400000000000000" pitchFamily="18" charset="-128"/>
+                      </a:endParaRPr>
+                    </a:p>
+                  </a:txBody>
+                  <a:tcPr marL="68580" marR="68580" marT="0" marB="0"/>
+                </a:tc>
+                <a:tc>
+                  <a:txBody>
+                    <a:bodyPr/>
+                    <a:lstStyle/>
+                    <a:p>
+                      <a:pPr algn="ctr">
+                        <a:lnSpc>
+                          <a:spcPct val="115000"/>
+                        </a:lnSpc>
+                        <a:buNone/>
+                      </a:pPr>
+                      <a:r>
+                        <a:rPr lang="ja-JP" sz="1200" b="1" kern="100">
+                          <a:effectLst/>
+                        </a:rPr>
+                        <a:t> Mô tả </a:t>
+                      </a:r>
+                      <a:endParaRPr lang="ja-JP" sz="1100" b="1" kern="100">
+                        <a:effectLst/>
+                        <a:latin typeface="Arial" panose="020B0604020202020204" pitchFamily="34" charset="0"/>
+                        <a:ea typeface="游明朝" panose="02020400000000000000" pitchFamily="18" charset="-128"/>
+                      </a:endParaRPr>
+                    </a:p>
+                  </a:txBody>
+                  <a:tcPr marL="68580" marR="68580" marT="0" marB="0"/>
+                </a:tc>
+                <a:tc>
+                  <a:txBody>
+                    <a:bodyPr/>
+                    <a:lstStyle/>
+                    <a:p>
+                      <a:pPr algn="ctr">
+                        <a:lnSpc>
+                          <a:spcPct val="115000"/>
+                        </a:lnSpc>
+                        <a:buNone/>
+                      </a:pPr>
+                      <a:r>
+                        <a:rPr lang="ja-JP" sz="1200" b="1" kern="100" dirty="0">
+                          <a:effectLst/>
+                        </a:rPr>
+                        <a:t>Ví dụ</a:t>
+                      </a:r>
+                      <a:endParaRPr lang="ja-JP" sz="1100" b="1" kern="100" dirty="0">
+                        <a:effectLst/>
+                        <a:latin typeface="Arial" panose="020B0604020202020204" pitchFamily="34" charset="0"/>
+                        <a:ea typeface="游明朝" panose="02020400000000000000" pitchFamily="18" charset="-128"/>
+                      </a:endParaRPr>
+                    </a:p>
+                  </a:txBody>
+                  <a:tcPr marL="68580" marR="68580" marT="0" marB="0"/>
+                </a:tc>
+                <a:extLst>
+                  <a:ext uri="{0D108BD9-81ED-4DB2-BD59-A6C34878D82A}">
+                    <a16:rowId xmlns:a16="http://schemas.microsoft.com/office/drawing/2014/main" val="3398161794"/>
+                  </a:ext>
+                </a:extLst>
+              </a:tr>
+              <a:tr h="364472">
+                <a:tc>
+                  <a:txBody>
+                    <a:bodyPr/>
+                    <a:lstStyle/>
+                    <a:p>
+                      <a:pPr>
+                        <a:lnSpc>
+                          <a:spcPct val="115000"/>
+                        </a:lnSpc>
+                        <a:buNone/>
+                      </a:pPr>
+                      <a:r>
+                        <a:rPr lang="ja-JP" sz="1200" kern="100" dirty="0">
+                          <a:effectLst/>
+                        </a:rPr>
+                        <a:t>append(String)</a:t>
+                      </a:r>
+                      <a:endParaRPr lang="ja-JP" sz="1100" kern="100" dirty="0">
+                        <a:effectLst/>
+                        <a:latin typeface="Arial" panose="020B0604020202020204" pitchFamily="34" charset="0"/>
+                        <a:ea typeface="游明朝" panose="02020400000000000000" pitchFamily="18" charset="-128"/>
+                      </a:endParaRPr>
+                    </a:p>
+                  </a:txBody>
+                  <a:tcPr marL="68580" marR="68580" marT="0" marB="0"/>
+                </a:tc>
+                <a:tc>
+                  <a:txBody>
+                    <a:bodyPr/>
+                    <a:lstStyle/>
+                    <a:p>
+                      <a:pPr>
+                        <a:lnSpc>
+                          <a:spcPct val="115000"/>
+                        </a:lnSpc>
+                        <a:buNone/>
+                      </a:pPr>
+                      <a:r>
+                        <a:rPr lang="ja-JP" sz="1200" kern="100">
+                          <a:effectLst/>
+                        </a:rPr>
+                        <a:t>Nối thêm vào cuối chuỗi </a:t>
+                      </a:r>
+                      <a:endParaRPr lang="ja-JP" sz="1100" kern="100">
+                        <a:effectLst/>
+                        <a:latin typeface="Arial" panose="020B0604020202020204" pitchFamily="34" charset="0"/>
+                        <a:ea typeface="游明朝" panose="02020400000000000000" pitchFamily="18" charset="-128"/>
+                      </a:endParaRPr>
+                    </a:p>
+                  </a:txBody>
+                  <a:tcPr marL="68580" marR="68580" marT="0" marB="0"/>
+                </a:tc>
+                <a:tc>
+                  <a:txBody>
+                    <a:bodyPr/>
+                    <a:lstStyle/>
+                    <a:p>
+                      <a:pPr>
+                        <a:lnSpc>
+                          <a:spcPct val="115000"/>
+                        </a:lnSpc>
+                        <a:buNone/>
+                      </a:pPr>
+                      <a:r>
+                        <a:rPr lang="ja-JP" sz="1200" kern="100">
+                          <a:effectLst/>
+                        </a:rPr>
+                        <a:t>sb.append("abc")</a:t>
+                      </a:r>
+                      <a:endParaRPr lang="ja-JP" sz="1100" kern="100">
+                        <a:effectLst/>
+                        <a:latin typeface="Arial" panose="020B0604020202020204" pitchFamily="34" charset="0"/>
+                        <a:ea typeface="游明朝" panose="02020400000000000000" pitchFamily="18" charset="-128"/>
+                      </a:endParaRPr>
+                    </a:p>
+                  </a:txBody>
+                  <a:tcPr marL="68580" marR="68580" marT="0" marB="0"/>
+                </a:tc>
+                <a:extLst>
+                  <a:ext uri="{0D108BD9-81ED-4DB2-BD59-A6C34878D82A}">
+                    <a16:rowId xmlns:a16="http://schemas.microsoft.com/office/drawing/2014/main" val="1784190079"/>
+                  </a:ext>
+                </a:extLst>
+              </a:tr>
+              <a:tr h="364472">
+                <a:tc>
+                  <a:txBody>
+                    <a:bodyPr/>
+                    <a:lstStyle/>
+                    <a:p>
+                      <a:pPr>
+                        <a:lnSpc>
+                          <a:spcPct val="115000"/>
+                        </a:lnSpc>
+                        <a:buNone/>
+                      </a:pPr>
+                      <a:r>
+                        <a:rPr lang="ja-JP" sz="1200" kern="100" dirty="0">
+                          <a:effectLst/>
+                        </a:rPr>
+                        <a:t>insert(int, String)</a:t>
+                      </a:r>
+                      <a:endParaRPr lang="ja-JP" sz="1100" kern="100" dirty="0">
+                        <a:effectLst/>
+                        <a:latin typeface="Arial" panose="020B0604020202020204" pitchFamily="34" charset="0"/>
+                        <a:ea typeface="游明朝" panose="02020400000000000000" pitchFamily="18" charset="-128"/>
+                      </a:endParaRPr>
+                    </a:p>
+                  </a:txBody>
+                  <a:tcPr marL="68580" marR="68580" marT="0" marB="0"/>
+                </a:tc>
+                <a:tc>
+                  <a:txBody>
+                    <a:bodyPr/>
+                    <a:lstStyle/>
+                    <a:p>
+                      <a:pPr>
+                        <a:lnSpc>
+                          <a:spcPct val="115000"/>
+                        </a:lnSpc>
+                        <a:buNone/>
+                      </a:pPr>
+                      <a:r>
+                        <a:rPr lang="ja-JP" sz="1200" kern="100">
+                          <a:effectLst/>
+                        </a:rPr>
+                        <a:t> Chèn chuỗi tại vị trí chỉ định</a:t>
+                      </a:r>
+                      <a:endParaRPr lang="ja-JP" sz="1100" kern="100">
+                        <a:effectLst/>
+                        <a:latin typeface="Arial" panose="020B0604020202020204" pitchFamily="34" charset="0"/>
+                        <a:ea typeface="游明朝" panose="02020400000000000000" pitchFamily="18" charset="-128"/>
+                      </a:endParaRPr>
+                    </a:p>
+                  </a:txBody>
+                  <a:tcPr marL="68580" marR="68580" marT="0" marB="0"/>
+                </a:tc>
+                <a:tc>
+                  <a:txBody>
+                    <a:bodyPr/>
+                    <a:lstStyle/>
+                    <a:p>
+                      <a:pPr>
+                        <a:lnSpc>
+                          <a:spcPct val="115000"/>
+                        </a:lnSpc>
+                        <a:buNone/>
+                      </a:pPr>
+                      <a:r>
+                        <a:rPr lang="ja-JP" sz="1200" kern="100">
+                          <a:effectLst/>
+                        </a:rPr>
+                        <a:t>sb.insert(0, "&gt;&gt;&gt; ")</a:t>
+                      </a:r>
+                      <a:endParaRPr lang="ja-JP" sz="1100" kern="100">
+                        <a:effectLst/>
+                        <a:latin typeface="Arial" panose="020B0604020202020204" pitchFamily="34" charset="0"/>
+                        <a:ea typeface="游明朝" panose="02020400000000000000" pitchFamily="18" charset="-128"/>
+                      </a:endParaRPr>
+                    </a:p>
+                  </a:txBody>
+                  <a:tcPr marL="68580" marR="68580" marT="0" marB="0"/>
+                </a:tc>
+                <a:extLst>
+                  <a:ext uri="{0D108BD9-81ED-4DB2-BD59-A6C34878D82A}">
+                    <a16:rowId xmlns:a16="http://schemas.microsoft.com/office/drawing/2014/main" val="1685460310"/>
+                  </a:ext>
+                </a:extLst>
+              </a:tr>
+              <a:tr h="364472">
+                <a:tc>
+                  <a:txBody>
+                    <a:bodyPr/>
+                    <a:lstStyle/>
+                    <a:p>
+                      <a:pPr>
+                        <a:lnSpc>
+                          <a:spcPct val="115000"/>
+                        </a:lnSpc>
+                        <a:buNone/>
+                      </a:pPr>
+                      <a:r>
+                        <a:rPr lang="ja-JP" sz="1200" kern="100" dirty="0">
+                          <a:effectLst/>
+                        </a:rPr>
+                        <a:t>delete(start, end)</a:t>
+                      </a:r>
+                      <a:endParaRPr lang="ja-JP" sz="1100" kern="100" dirty="0">
+                        <a:effectLst/>
+                        <a:latin typeface="Arial" panose="020B0604020202020204" pitchFamily="34" charset="0"/>
+                        <a:ea typeface="游明朝" panose="02020400000000000000" pitchFamily="18" charset="-128"/>
+                      </a:endParaRPr>
+                    </a:p>
+                  </a:txBody>
+                  <a:tcPr marL="68580" marR="68580" marT="0" marB="0"/>
+                </a:tc>
+                <a:tc>
+                  <a:txBody>
+                    <a:bodyPr/>
+                    <a:lstStyle/>
+                    <a:p>
+                      <a:pPr>
+                        <a:lnSpc>
+                          <a:spcPct val="115000"/>
+                        </a:lnSpc>
+                        <a:buNone/>
+                      </a:pPr>
+                      <a:r>
+                        <a:rPr lang="ja-JP" sz="1200" kern="100">
+                          <a:effectLst/>
+                        </a:rPr>
+                        <a:t> Xóa chuỗi con</a:t>
+                      </a:r>
+                      <a:endParaRPr lang="ja-JP" sz="1100" kern="100">
+                        <a:effectLst/>
+                        <a:latin typeface="Arial" panose="020B0604020202020204" pitchFamily="34" charset="0"/>
+                        <a:ea typeface="游明朝" panose="02020400000000000000" pitchFamily="18" charset="-128"/>
+                      </a:endParaRPr>
+                    </a:p>
+                  </a:txBody>
+                  <a:tcPr marL="68580" marR="68580" marT="0" marB="0"/>
+                </a:tc>
+                <a:tc>
+                  <a:txBody>
+                    <a:bodyPr/>
+                    <a:lstStyle/>
+                    <a:p>
+                      <a:pPr>
+                        <a:lnSpc>
+                          <a:spcPct val="115000"/>
+                        </a:lnSpc>
+                        <a:buNone/>
+                      </a:pPr>
+                      <a:r>
+                        <a:rPr lang="ja-JP" sz="1200" kern="100">
+                          <a:effectLst/>
+                        </a:rPr>
+                        <a:t>sb.delete(2, 4)</a:t>
+                      </a:r>
+                      <a:endParaRPr lang="ja-JP" sz="1100" kern="100">
+                        <a:effectLst/>
+                        <a:latin typeface="Arial" panose="020B0604020202020204" pitchFamily="34" charset="0"/>
+                        <a:ea typeface="游明朝" panose="02020400000000000000" pitchFamily="18" charset="-128"/>
+                      </a:endParaRPr>
+                    </a:p>
+                  </a:txBody>
+                  <a:tcPr marL="68580" marR="68580" marT="0" marB="0"/>
+                </a:tc>
+                <a:extLst>
+                  <a:ext uri="{0D108BD9-81ED-4DB2-BD59-A6C34878D82A}">
+                    <a16:rowId xmlns:a16="http://schemas.microsoft.com/office/drawing/2014/main" val="2516292980"/>
+                  </a:ext>
+                </a:extLst>
+              </a:tr>
+              <a:tr h="364472">
+                <a:tc>
+                  <a:txBody>
+                    <a:bodyPr/>
+                    <a:lstStyle/>
+                    <a:p>
+                      <a:pPr>
+                        <a:lnSpc>
+                          <a:spcPct val="115000"/>
+                        </a:lnSpc>
+                        <a:buNone/>
+                      </a:pPr>
+                      <a:r>
+                        <a:rPr lang="ja-JP" sz="1200" kern="100" dirty="0">
+                          <a:effectLst/>
+                        </a:rPr>
+                        <a:t>replace(start, end, str)</a:t>
+                      </a:r>
+                      <a:endParaRPr lang="ja-JP" sz="1100" kern="100" dirty="0">
+                        <a:effectLst/>
+                        <a:latin typeface="Arial" panose="020B0604020202020204" pitchFamily="34" charset="0"/>
+                        <a:ea typeface="游明朝" panose="02020400000000000000" pitchFamily="18" charset="-128"/>
+                      </a:endParaRPr>
+                    </a:p>
+                  </a:txBody>
+                  <a:tcPr marL="68580" marR="68580" marT="0" marB="0"/>
+                </a:tc>
+                <a:tc>
+                  <a:txBody>
+                    <a:bodyPr/>
+                    <a:lstStyle/>
+                    <a:p>
+                      <a:pPr>
+                        <a:lnSpc>
+                          <a:spcPct val="115000"/>
+                        </a:lnSpc>
+                        <a:buNone/>
+                      </a:pPr>
+                      <a:r>
+                        <a:rPr lang="ja-JP" sz="1200" kern="100">
+                          <a:effectLst/>
+                        </a:rPr>
+                        <a:t> Thay thế chuỗi con </a:t>
+                      </a:r>
+                      <a:endParaRPr lang="ja-JP" sz="1100" kern="100">
+                        <a:effectLst/>
+                        <a:latin typeface="Arial" panose="020B0604020202020204" pitchFamily="34" charset="0"/>
+                        <a:ea typeface="游明朝" panose="02020400000000000000" pitchFamily="18" charset="-128"/>
+                      </a:endParaRPr>
+                    </a:p>
+                  </a:txBody>
+                  <a:tcPr marL="68580" marR="68580" marT="0" marB="0"/>
+                </a:tc>
+                <a:tc>
+                  <a:txBody>
+                    <a:bodyPr/>
+                    <a:lstStyle/>
+                    <a:p>
+                      <a:pPr>
+                        <a:lnSpc>
+                          <a:spcPct val="115000"/>
+                        </a:lnSpc>
+                        <a:buNone/>
+                      </a:pPr>
+                      <a:r>
+                        <a:rPr lang="ja-JP" sz="1200" kern="100">
+                          <a:effectLst/>
+                        </a:rPr>
+                        <a:t>sb.replace(0, 4, "Hi")</a:t>
+                      </a:r>
+                      <a:endParaRPr lang="ja-JP" sz="1100" kern="100">
+                        <a:effectLst/>
+                        <a:latin typeface="Arial" panose="020B0604020202020204" pitchFamily="34" charset="0"/>
+                        <a:ea typeface="游明朝" panose="02020400000000000000" pitchFamily="18" charset="-128"/>
+                      </a:endParaRPr>
+                    </a:p>
+                  </a:txBody>
+                  <a:tcPr marL="68580" marR="68580" marT="0" marB="0"/>
+                </a:tc>
+                <a:extLst>
+                  <a:ext uri="{0D108BD9-81ED-4DB2-BD59-A6C34878D82A}">
+                    <a16:rowId xmlns:a16="http://schemas.microsoft.com/office/drawing/2014/main" val="3495273148"/>
+                  </a:ext>
+                </a:extLst>
+              </a:tr>
+              <a:tr h="364472">
+                <a:tc>
+                  <a:txBody>
+                    <a:bodyPr/>
+                    <a:lstStyle/>
+                    <a:p>
+                      <a:pPr>
+                        <a:lnSpc>
+                          <a:spcPct val="115000"/>
+                        </a:lnSpc>
+                        <a:buNone/>
+                      </a:pPr>
+                      <a:r>
+                        <a:rPr lang="ja-JP" sz="1200" kern="100">
+                          <a:effectLst/>
+                        </a:rPr>
+                        <a:t>reverse()</a:t>
+                      </a:r>
+                      <a:endParaRPr lang="ja-JP" sz="1100" kern="100">
+                        <a:effectLst/>
+                        <a:latin typeface="Arial" panose="020B0604020202020204" pitchFamily="34" charset="0"/>
+                        <a:ea typeface="游明朝" panose="02020400000000000000" pitchFamily="18" charset="-128"/>
+                      </a:endParaRPr>
+                    </a:p>
+                  </a:txBody>
+                  <a:tcPr marL="68580" marR="68580" marT="0" marB="0"/>
+                </a:tc>
+                <a:tc>
+                  <a:txBody>
+                    <a:bodyPr/>
+                    <a:lstStyle/>
+                    <a:p>
+                      <a:pPr>
+                        <a:lnSpc>
+                          <a:spcPct val="115000"/>
+                        </a:lnSpc>
+                        <a:buNone/>
+                      </a:pPr>
+                      <a:r>
+                        <a:rPr lang="ja-JP" sz="1200" kern="100">
+                          <a:effectLst/>
+                        </a:rPr>
+                        <a:t> Đảo ngược chuỗi  </a:t>
+                      </a:r>
+                      <a:endParaRPr lang="ja-JP" sz="1100" kern="100">
+                        <a:effectLst/>
+                        <a:latin typeface="Arial" panose="020B0604020202020204" pitchFamily="34" charset="0"/>
+                        <a:ea typeface="游明朝" panose="02020400000000000000" pitchFamily="18" charset="-128"/>
+                      </a:endParaRPr>
+                    </a:p>
+                  </a:txBody>
+                  <a:tcPr marL="68580" marR="68580" marT="0" marB="0"/>
+                </a:tc>
+                <a:tc>
+                  <a:txBody>
+                    <a:bodyPr/>
+                    <a:lstStyle/>
+                    <a:p>
+                      <a:pPr>
+                        <a:lnSpc>
+                          <a:spcPct val="115000"/>
+                        </a:lnSpc>
+                        <a:buNone/>
+                      </a:pPr>
+                      <a:r>
+                        <a:rPr lang="ja-JP" sz="1200" kern="100" dirty="0">
+                          <a:effectLst/>
+                        </a:rPr>
+                        <a:t>sb.reverse()</a:t>
+                      </a:r>
+                      <a:endParaRPr lang="ja-JP" sz="1100" kern="100" dirty="0">
+                        <a:effectLst/>
+                        <a:latin typeface="Arial" panose="020B0604020202020204" pitchFamily="34" charset="0"/>
+                        <a:ea typeface="游明朝" panose="02020400000000000000" pitchFamily="18" charset="-128"/>
+                      </a:endParaRPr>
+                    </a:p>
+                  </a:txBody>
+                  <a:tcPr marL="68580" marR="68580" marT="0" marB="0"/>
+                </a:tc>
+                <a:extLst>
+                  <a:ext uri="{0D108BD9-81ED-4DB2-BD59-A6C34878D82A}">
+                    <a16:rowId xmlns:a16="http://schemas.microsoft.com/office/drawing/2014/main" val="571755838"/>
+                  </a:ext>
+                </a:extLst>
+              </a:tr>
+            </a:tbl>
+          </a:graphicData>
+        </a:graphic>
+      </p:graphicFrame>
+      <p:sp>
+        <p:nvSpPr>
+          <p:cNvPr id="4" name="Slide Number Placeholder 3">
+            <a:extLst>
+              <a:ext uri="{FF2B5EF4-FFF2-40B4-BE49-F238E27FC236}">
+                <a16:creationId xmlns:a16="http://schemas.microsoft.com/office/drawing/2014/main" id="{19596CCD-305B-84F7-DF66-E6D9CCF81DDD}"/>
+              </a:ext>
+            </a:extLst>
+          </p:cNvPr>
+          <p:cNvSpPr>
+            <a:spLocks noGrp="1"/>
+          </p:cNvSpPr>
+          <p:nvPr>
+            <p:ph type="sldNum" sz="quarter" idx="11"/>
+          </p:nvPr>
+        </p:nvSpPr>
+        <p:spPr/>
+        <p:txBody>
+          <a:bodyPr/>
+          <a:lstStyle/>
+          <a:p>
+            <a:pPr>
+              <a:defRPr/>
+            </a:pPr>
+            <a:r>
+              <a:rPr lang="en-US" altLang="ja-JP"/>
+              <a:t>Page:</a:t>
+            </a:r>
+            <a:r>
+              <a:rPr lang="ja-JP" altLang="en-US"/>
+              <a:t> </a:t>
+            </a:r>
+            <a:fld id="{DC07468E-517B-4E9D-8840-A4568A307980}" type="slidenum">
+              <a:rPr lang="en-US" altLang="ja-JP" smtClean="0"/>
+              <a:pPr>
+                <a:defRPr/>
+              </a:pPr>
+              <a:t>9</a:t>
+            </a:fld>
+            <a:endParaRPr lang="en-US" altLang="ja-JP"/>
+          </a:p>
+        </p:txBody>
+      </p:sp>
+      <p:sp>
+        <p:nvSpPr>
+          <p:cNvPr id="7" name="TextBox 6">
+            <a:extLst>
+              <a:ext uri="{FF2B5EF4-FFF2-40B4-BE49-F238E27FC236}">
+                <a16:creationId xmlns:a16="http://schemas.microsoft.com/office/drawing/2014/main" id="{869DB85F-21D1-65A8-64DD-026C30A9E0A9}"/>
+              </a:ext>
+            </a:extLst>
+          </p:cNvPr>
+          <p:cNvSpPr txBox="1"/>
+          <p:nvPr/>
+        </p:nvSpPr>
+        <p:spPr>
+          <a:xfrm>
+            <a:off x="457200" y="1025871"/>
+            <a:ext cx="5943600" cy="416011"/>
+          </a:xfrm>
+          <a:prstGeom prst="rect">
+            <a:avLst/>
+          </a:prstGeom>
+          <a:noFill/>
+        </p:spPr>
+        <p:txBody>
+          <a:bodyPr wrap="square">
+            <a:spAutoFit/>
+          </a:bodyPr>
+          <a:lstStyle/>
+          <a:p>
+            <a:pPr>
+              <a:lnSpc>
+                <a:spcPct val="150000"/>
+              </a:lnSpc>
+              <a:buNone/>
+            </a:pPr>
+            <a:endParaRPr lang="ja-JP" altLang="ja-JP" dirty="0">
+              <a:effectLst/>
+              <a:latin typeface="Arial" panose="020B0604020202020204" pitchFamily="34" charset="0"/>
+              <a:ea typeface="游明朝" panose="02020400000000000000" pitchFamily="18" charset="-128"/>
+            </a:endParaRPr>
+          </a:p>
+        </p:txBody>
+      </p:sp>
+      <p:graphicFrame>
+        <p:nvGraphicFramePr>
+          <p:cNvPr id="8" name="Table 7">
+            <a:extLst>
+              <a:ext uri="{FF2B5EF4-FFF2-40B4-BE49-F238E27FC236}">
+                <a16:creationId xmlns:a16="http://schemas.microsoft.com/office/drawing/2014/main" id="{FC019375-80D3-8DA0-956D-6071F7F659EE}"/>
+              </a:ext>
+            </a:extLst>
+          </p:cNvPr>
+          <p:cNvGraphicFramePr>
+            <a:graphicFrameLocks noGrp="1"/>
+          </p:cNvGraphicFramePr>
+          <p:nvPr>
+            <p:extLst>
+              <p:ext uri="{D42A27DB-BD31-4B8C-83A1-F6EECF244321}">
+                <p14:modId xmlns:p14="http://schemas.microsoft.com/office/powerpoint/2010/main" val="1687566762"/>
+              </p:ext>
+            </p:extLst>
+          </p:nvPr>
+        </p:nvGraphicFramePr>
+        <p:xfrm>
+          <a:off x="457200" y="3799891"/>
+          <a:ext cx="8991600" cy="2423160"/>
+        </p:xfrm>
+        <a:graphic>
+          <a:graphicData uri="http://schemas.openxmlformats.org/drawingml/2006/table">
+            <a:tbl>
+              <a:tblPr firstRow="1" bandRow="1">
+                <a:tableStyleId>{5C22544A-7EE6-4342-B048-85BDC9FD1C3A}</a:tableStyleId>
+              </a:tblPr>
+              <a:tblGrid>
+                <a:gridCol w="4495800">
+                  <a:extLst>
+                    <a:ext uri="{9D8B030D-6E8A-4147-A177-3AD203B41FA5}">
+                      <a16:colId xmlns:a16="http://schemas.microsoft.com/office/drawing/2014/main" val="4119211718"/>
+                    </a:ext>
+                  </a:extLst>
+                </a:gridCol>
+                <a:gridCol w="4495800">
+                  <a:extLst>
+                    <a:ext uri="{9D8B030D-6E8A-4147-A177-3AD203B41FA5}">
+                      <a16:colId xmlns:a16="http://schemas.microsoft.com/office/drawing/2014/main" val="1742713055"/>
+                    </a:ext>
+                  </a:extLst>
+                </a:gridCol>
+              </a:tblGrid>
+              <a:tr h="0">
+                <a:tc>
+                  <a:txBody>
+                    <a:bodyPr/>
+                    <a:lstStyle/>
+                    <a:p>
+                      <a:pPr>
+                        <a:lnSpc>
+                          <a:spcPct val="150000"/>
+                        </a:lnSpc>
+                        <a:buNone/>
+                      </a:pPr>
+                      <a:r>
+                        <a:rPr lang="ja-JP" altLang="ja-JP" sz="1800" dirty="0">
+                          <a:effectLst/>
+                          <a:latin typeface="Arial" panose="020B0604020202020204" pitchFamily="34" charset="0"/>
+                          <a:ea typeface="Roboto" panose="02000000000000000000" pitchFamily="2" charset="0"/>
+                          <a:cs typeface="Roboto" panose="02000000000000000000" pitchFamily="2" charset="0"/>
+                        </a:rPr>
+                        <a:t>// Dùng String (chậm)</a:t>
+                      </a:r>
+                      <a:endParaRPr lang="ja-JP" altLang="ja-JP" sz="1600" dirty="0">
+                        <a:effectLst/>
+                        <a:latin typeface="Arial" panose="020B0604020202020204" pitchFamily="34" charset="0"/>
+                        <a:ea typeface="游明朝" panose="02020400000000000000" pitchFamily="18" charset="-128"/>
+                      </a:endParaRPr>
+                    </a:p>
+                    <a:p>
+                      <a:pPr>
+                        <a:lnSpc>
+                          <a:spcPct val="150000"/>
+                        </a:lnSpc>
+                        <a:buNone/>
+                      </a:pPr>
+                      <a:r>
+                        <a:rPr lang="ja-JP" altLang="ja-JP" sz="1800" dirty="0">
+                          <a:effectLst/>
+                          <a:latin typeface="Arial" panose="020B0604020202020204" pitchFamily="34" charset="0"/>
+                          <a:ea typeface="Roboto" panose="02000000000000000000" pitchFamily="2" charset="0"/>
+                          <a:cs typeface="Roboto" panose="02000000000000000000" pitchFamily="2" charset="0"/>
+                        </a:rPr>
+                        <a:t>String s = "";</a:t>
+                      </a:r>
+                      <a:endParaRPr lang="ja-JP" altLang="ja-JP" sz="1600" dirty="0">
+                        <a:effectLst/>
+                        <a:latin typeface="Arial" panose="020B0604020202020204" pitchFamily="34" charset="0"/>
+                        <a:ea typeface="游明朝" panose="02020400000000000000" pitchFamily="18" charset="-128"/>
+                      </a:endParaRPr>
+                    </a:p>
+                    <a:p>
+                      <a:pPr>
+                        <a:lnSpc>
+                          <a:spcPct val="150000"/>
+                        </a:lnSpc>
+                        <a:buNone/>
+                      </a:pPr>
+                      <a:r>
+                        <a:rPr lang="ja-JP" altLang="ja-JP" sz="1800" dirty="0">
+                          <a:effectLst/>
+                          <a:latin typeface="Arial" panose="020B0604020202020204" pitchFamily="34" charset="0"/>
+                          <a:ea typeface="Roboto" panose="02000000000000000000" pitchFamily="2" charset="0"/>
+                          <a:cs typeface="Roboto" panose="02000000000000000000" pitchFamily="2" charset="0"/>
+                        </a:rPr>
+                        <a:t>for (int i = 0; i &lt; 10000; i++) {</a:t>
+                      </a:r>
+                      <a:endParaRPr lang="ja-JP" altLang="ja-JP" sz="1600" dirty="0">
+                        <a:effectLst/>
+                        <a:latin typeface="Arial" panose="020B0604020202020204" pitchFamily="34" charset="0"/>
+                        <a:ea typeface="游明朝" panose="02020400000000000000" pitchFamily="18" charset="-128"/>
+                      </a:endParaRPr>
+                    </a:p>
+                    <a:p>
+                      <a:pPr>
+                        <a:lnSpc>
+                          <a:spcPct val="150000"/>
+                        </a:lnSpc>
+                        <a:buNone/>
+                      </a:pPr>
+                      <a:r>
+                        <a:rPr lang="ja-JP" altLang="ja-JP" sz="1800" dirty="0">
+                          <a:effectLst/>
+                          <a:latin typeface="Arial" panose="020B0604020202020204" pitchFamily="34" charset="0"/>
+                          <a:ea typeface="Roboto" panose="02000000000000000000" pitchFamily="2" charset="0"/>
+                          <a:cs typeface="Roboto" panose="02000000000000000000" pitchFamily="2" charset="0"/>
+                        </a:rPr>
+                        <a:t>    s = s + i;</a:t>
+                      </a:r>
+                      <a:endParaRPr lang="ja-JP" altLang="ja-JP" sz="1600" dirty="0">
+                        <a:effectLst/>
+                        <a:latin typeface="Arial" panose="020B0604020202020204" pitchFamily="34" charset="0"/>
+                        <a:ea typeface="游明朝" panose="02020400000000000000" pitchFamily="18" charset="-128"/>
+                      </a:endParaRPr>
+                    </a:p>
+                    <a:p>
+                      <a:pPr>
+                        <a:lnSpc>
+                          <a:spcPct val="150000"/>
+                        </a:lnSpc>
+                        <a:buNone/>
+                      </a:pPr>
+                      <a:r>
+                        <a:rPr lang="ja-JP" altLang="ja-JP" sz="1800" dirty="0">
+                          <a:effectLst/>
+                          <a:latin typeface="Arial" panose="020B0604020202020204" pitchFamily="34" charset="0"/>
+                          <a:ea typeface="Roboto" panose="02000000000000000000" pitchFamily="2" charset="0"/>
+                          <a:cs typeface="Roboto" panose="02000000000000000000" pitchFamily="2" charset="0"/>
+                        </a:rPr>
+                        <a:t>} </a:t>
+                      </a:r>
+                      <a:endParaRPr lang="ja-JP" altLang="ja-JP" sz="1600" dirty="0">
+                        <a:effectLst/>
+                        <a:latin typeface="Arial" panose="020B0604020202020204" pitchFamily="34" charset="0"/>
+                        <a:ea typeface="游明朝" panose="02020400000000000000" pitchFamily="18" charset="-128"/>
+                      </a:endParaRPr>
+                    </a:p>
+                    <a:p>
+                      <a:endParaRPr kumimoji="1" lang="ja-JP" altLang="en-US" dirty="0"/>
+                    </a:p>
+                  </a:txBody>
+                  <a:tcPr/>
+                </a:tc>
+                <a:tc>
+                  <a:txBody>
+                    <a:bodyPr/>
+                    <a:lstStyle/>
+                    <a:p>
+                      <a:pPr>
+                        <a:lnSpc>
+                          <a:spcPct val="150000"/>
+                        </a:lnSpc>
+                        <a:buNone/>
+                      </a:pPr>
+                      <a:r>
+                        <a:rPr lang="ja-JP" altLang="ja-JP" sz="1800" dirty="0">
+                          <a:effectLst/>
+                          <a:latin typeface="Arial" panose="020B0604020202020204" pitchFamily="34" charset="0"/>
+                          <a:ea typeface="Roboto" panose="02000000000000000000" pitchFamily="2" charset="0"/>
+                          <a:cs typeface="Roboto" panose="02000000000000000000" pitchFamily="2" charset="0"/>
+                        </a:rPr>
+                        <a:t>// Dùng StringBuilder (nhanh)</a:t>
+                      </a:r>
+                      <a:endParaRPr lang="ja-JP" altLang="ja-JP" sz="1600" dirty="0">
+                        <a:effectLst/>
+                        <a:latin typeface="Arial" panose="020B0604020202020204" pitchFamily="34" charset="0"/>
+                        <a:ea typeface="游明朝" panose="02020400000000000000" pitchFamily="18" charset="-128"/>
+                      </a:endParaRPr>
+                    </a:p>
+                    <a:p>
+                      <a:pPr>
+                        <a:lnSpc>
+                          <a:spcPct val="150000"/>
+                        </a:lnSpc>
+                        <a:buNone/>
+                      </a:pPr>
+                      <a:r>
+                        <a:rPr lang="ja-JP" altLang="ja-JP" sz="1800" dirty="0">
+                          <a:effectLst/>
+                          <a:latin typeface="Arial" panose="020B0604020202020204" pitchFamily="34" charset="0"/>
+                          <a:ea typeface="Roboto" panose="02000000000000000000" pitchFamily="2" charset="0"/>
+                          <a:cs typeface="Roboto" panose="02000000000000000000" pitchFamily="2" charset="0"/>
+                        </a:rPr>
+                        <a:t>StringBuilder sb = new StringBuilder();</a:t>
+                      </a:r>
+                      <a:endParaRPr lang="ja-JP" altLang="ja-JP" sz="1600" dirty="0">
+                        <a:effectLst/>
+                        <a:latin typeface="Arial" panose="020B0604020202020204" pitchFamily="34" charset="0"/>
+                        <a:ea typeface="游明朝" panose="02020400000000000000" pitchFamily="18" charset="-128"/>
+                      </a:endParaRPr>
+                    </a:p>
+                    <a:p>
+                      <a:pPr>
+                        <a:lnSpc>
+                          <a:spcPct val="150000"/>
+                        </a:lnSpc>
+                        <a:buNone/>
+                      </a:pPr>
+                      <a:r>
+                        <a:rPr lang="ja-JP" altLang="ja-JP" sz="1800" dirty="0">
+                          <a:effectLst/>
+                          <a:latin typeface="Arial" panose="020B0604020202020204" pitchFamily="34" charset="0"/>
+                          <a:ea typeface="Roboto" panose="02000000000000000000" pitchFamily="2" charset="0"/>
+                          <a:cs typeface="Roboto" panose="02000000000000000000" pitchFamily="2" charset="0"/>
+                        </a:rPr>
+                        <a:t>for (int i = 0; i &lt; 10000; i++) {</a:t>
+                      </a:r>
+                      <a:endParaRPr lang="ja-JP" altLang="ja-JP" sz="1600" dirty="0">
+                        <a:effectLst/>
+                        <a:latin typeface="Arial" panose="020B0604020202020204" pitchFamily="34" charset="0"/>
+                        <a:ea typeface="游明朝" panose="02020400000000000000" pitchFamily="18" charset="-128"/>
+                      </a:endParaRPr>
+                    </a:p>
+                    <a:p>
+                      <a:pPr>
+                        <a:lnSpc>
+                          <a:spcPct val="150000"/>
+                        </a:lnSpc>
+                        <a:buNone/>
+                      </a:pPr>
+                      <a:r>
+                        <a:rPr lang="ja-JP" altLang="ja-JP" sz="1800" dirty="0">
+                          <a:effectLst/>
+                          <a:latin typeface="Arial" panose="020B0604020202020204" pitchFamily="34" charset="0"/>
+                          <a:ea typeface="Roboto" panose="02000000000000000000" pitchFamily="2" charset="0"/>
+                          <a:cs typeface="Roboto" panose="02000000000000000000" pitchFamily="2" charset="0"/>
+                        </a:rPr>
+                        <a:t>    sb.append(i);</a:t>
+                      </a:r>
+                      <a:endParaRPr lang="ja-JP" altLang="ja-JP" sz="1600" dirty="0">
+                        <a:effectLst/>
+                        <a:latin typeface="Arial" panose="020B0604020202020204" pitchFamily="34" charset="0"/>
+                        <a:ea typeface="游明朝" panose="02020400000000000000" pitchFamily="18" charset="-128"/>
+                      </a:endParaRPr>
+                    </a:p>
+                    <a:p>
+                      <a:pPr>
+                        <a:lnSpc>
+                          <a:spcPct val="150000"/>
+                        </a:lnSpc>
+                        <a:buNone/>
+                      </a:pPr>
+                      <a:r>
+                        <a:rPr lang="ja-JP" altLang="ja-JP" sz="1800" dirty="0">
+                          <a:effectLst/>
+                          <a:latin typeface="Arial" panose="020B0604020202020204" pitchFamily="34" charset="0"/>
+                          <a:ea typeface="Roboto" panose="02000000000000000000" pitchFamily="2" charset="0"/>
+                          <a:cs typeface="Roboto" panose="02000000000000000000" pitchFamily="2" charset="0"/>
+                        </a:rPr>
+                        <a:t>}</a:t>
+                      </a:r>
+                      <a:endParaRPr lang="ja-JP" altLang="ja-JP" sz="1600" dirty="0">
+                        <a:effectLst/>
+                        <a:latin typeface="Arial" panose="020B0604020202020204" pitchFamily="34" charset="0"/>
+                        <a:ea typeface="游明朝" panose="02020400000000000000" pitchFamily="18" charset="-128"/>
+                      </a:endParaRPr>
+                    </a:p>
+                    <a:p>
+                      <a:endParaRPr kumimoji="1" lang="ja-JP" altLang="en-US" dirty="0"/>
+                    </a:p>
+                  </a:txBody>
+                  <a:tcPr/>
+                </a:tc>
+                <a:extLst>
+                  <a:ext uri="{0D108BD9-81ED-4DB2-BD59-A6C34878D82A}">
+                    <a16:rowId xmlns:a16="http://schemas.microsoft.com/office/drawing/2014/main" val="45031842"/>
+                  </a:ext>
+                </a:extLst>
+              </a:tr>
+            </a:tbl>
+          </a:graphicData>
+        </a:graphic>
+      </p:graphicFrame>
+    </p:spTree>
+    <p:extLst>
+      <p:ext uri="{BB962C8B-B14F-4D97-AF65-F5344CB8AC3E}">
+        <p14:creationId xmlns:p14="http://schemas.microsoft.com/office/powerpoint/2010/main" val="2275901990"/>
       </p:ext>
     </p:extLst>
   </p:cSld>

--- a/Java_Week3.pptx
+++ b/Java_Week3.pptx
@@ -6,10 +6,10 @@
     <p:sldMasterId id="2147483796" r:id="rId2"/>
   </p:sldMasterIdLst>
   <p:notesMasterIdLst>
-    <p:notesMasterId r:id="rId13"/>
+    <p:notesMasterId r:id="rId12"/>
   </p:notesMasterIdLst>
   <p:handoutMasterIdLst>
-    <p:handoutMasterId r:id="rId14"/>
+    <p:handoutMasterId r:id="rId13"/>
   </p:handoutMasterIdLst>
   <p:sldIdLst>
     <p:sldId id="689" r:id="rId3"/>
@@ -21,7 +21,6 @@
     <p:sldId id="695" r:id="rId9"/>
     <p:sldId id="696" r:id="rId10"/>
     <p:sldId id="697" r:id="rId11"/>
-    <p:sldId id="698" r:id="rId12"/>
   </p:sldIdLst>
   <p:sldSz cx="9906000" cy="6858000" type="A4"/>
   <p:notesSz cx="7104063" cy="10234613"/>
@@ -2574,7 +2573,7 @@
           <a:p>
             <a:fld id="{A1E4D65A-0EC1-4CBC-8539-F9FD2B92F981}" type="datetimeFigureOut">
               <a:rPr kumimoji="1" lang="ja-JP" altLang="en-US" smtClean="0"/>
-              <a:t>2026/8/7</a:t>
+              <a:t>2026/8/10</a:t>
             </a:fld>
             <a:endParaRPr kumimoji="1" lang="ja-JP" altLang="en-US"/>
           </a:p>
@@ -4936,7 +4935,7 @@
           <a:p>
             <a:fld id="{A1E4D65A-0EC1-4CBC-8539-F9FD2B92F981}" type="datetimeFigureOut">
               <a:rPr kumimoji="1" lang="ja-JP" altLang="en-US" smtClean="0"/>
-              <a:t>2026/8/7</a:t>
+              <a:t>2026/8/10</a:t>
             </a:fld>
             <a:endParaRPr kumimoji="1" lang="ja-JP" altLang="en-US"/>
           </a:p>
@@ -5506,129 +5505,6 @@
     <p:extLst>
       <p:ext uri="{BB962C8B-B14F-4D97-AF65-F5344CB8AC3E}">
         <p14:creationId xmlns:p14="http://schemas.microsoft.com/office/powerpoint/2010/main" val="4232930616"/>
-      </p:ext>
-    </p:extLst>
-  </p:cSld>
-  <p:clrMapOvr>
-    <a:masterClrMapping/>
-  </p:clrMapOvr>
-</p:sld>
-</file>
-
-<file path=ppt/slides/slide10.xml><?xml version="1.0" encoding="utf-8"?>
-<p:sld xmlns:a="http://schemas.openxmlformats.org/drawingml/2006/main" xmlns:r="http://schemas.openxmlformats.org/officeDocument/2006/relationships" xmlns:p="http://schemas.openxmlformats.org/presentationml/2006/main">
-  <p:cSld>
-    <p:spTree>
-      <p:nvGrpSpPr>
-        <p:cNvPr id="1" name=""/>
-        <p:cNvGrpSpPr/>
-        <p:nvPr/>
-      </p:nvGrpSpPr>
-      <p:grpSpPr>
-        <a:xfrm>
-          <a:off x="0" y="0"/>
-          <a:ext cx="0" cy="0"/>
-          <a:chOff x="0" y="0"/>
-          <a:chExt cx="0" cy="0"/>
-        </a:xfrm>
-      </p:grpSpPr>
-      <p:sp>
-        <p:nvSpPr>
-          <p:cNvPr id="2" name="Title 1">
-            <a:extLst>
-              <a:ext uri="{FF2B5EF4-FFF2-40B4-BE49-F238E27FC236}">
-                <a16:creationId xmlns:a16="http://schemas.microsoft.com/office/drawing/2014/main" id="{F8D9EC49-14F9-7C5B-C51C-65CB6C44DB53}"/>
-              </a:ext>
-            </a:extLst>
-          </p:cNvPr>
-          <p:cNvSpPr>
-            <a:spLocks noGrp="1"/>
-          </p:cNvSpPr>
-          <p:nvPr>
-            <p:ph type="title"/>
-          </p:nvPr>
-        </p:nvSpPr>
-        <p:spPr/>
-        <p:txBody>
-          <a:bodyPr/>
-          <a:lstStyle/>
-          <a:p>
-            <a:endParaRPr kumimoji="1" lang="ja-JP" altLang="en-US"/>
-          </a:p>
-        </p:txBody>
-      </p:sp>
-      <p:sp>
-        <p:nvSpPr>
-          <p:cNvPr id="3" name="Content Placeholder 2">
-            <a:extLst>
-              <a:ext uri="{FF2B5EF4-FFF2-40B4-BE49-F238E27FC236}">
-                <a16:creationId xmlns:a16="http://schemas.microsoft.com/office/drawing/2014/main" id="{76EC0B77-6AD0-368D-8EB2-F5471FECBFA9}"/>
-              </a:ext>
-            </a:extLst>
-          </p:cNvPr>
-          <p:cNvSpPr>
-            <a:spLocks noGrp="1"/>
-          </p:cNvSpPr>
-          <p:nvPr>
-            <p:ph idx="1"/>
-          </p:nvPr>
-        </p:nvSpPr>
-        <p:spPr/>
-        <p:txBody>
-          <a:bodyPr/>
-          <a:lstStyle/>
-          <a:p>
-            <a:endParaRPr kumimoji="1" lang="ja-JP" altLang="en-US"/>
-          </a:p>
-        </p:txBody>
-      </p:sp>
-      <p:sp>
-        <p:nvSpPr>
-          <p:cNvPr id="4" name="Slide Number Placeholder 3">
-            <a:extLst>
-              <a:ext uri="{FF2B5EF4-FFF2-40B4-BE49-F238E27FC236}">
-                <a16:creationId xmlns:a16="http://schemas.microsoft.com/office/drawing/2014/main" id="{34F2EA56-7375-A1D0-3AD4-CE7697A6BF72}"/>
-              </a:ext>
-            </a:extLst>
-          </p:cNvPr>
-          <p:cNvSpPr>
-            <a:spLocks noGrp="1"/>
-          </p:cNvSpPr>
-          <p:nvPr>
-            <p:ph type="sldNum" sz="quarter" idx="11"/>
-          </p:nvPr>
-        </p:nvSpPr>
-        <p:spPr/>
-        <p:txBody>
-          <a:bodyPr/>
-          <a:lstStyle/>
-          <a:p>
-            <a:pPr>
-              <a:defRPr/>
-            </a:pPr>
-            <a:r>
-              <a:rPr lang="en-US" altLang="ja-JP"/>
-              <a:t>Page:</a:t>
-            </a:r>
-            <a:r>
-              <a:rPr lang="ja-JP" altLang="en-US"/>
-              <a:t> </a:t>
-            </a:r>
-            <a:fld id="{DC07468E-517B-4E9D-8840-A4568A307980}" type="slidenum">
-              <a:rPr lang="en-US" altLang="ja-JP" smtClean="0"/>
-              <a:pPr>
-                <a:defRPr/>
-              </a:pPr>
-              <a:t>10</a:t>
-            </a:fld>
-            <a:endParaRPr lang="en-US" altLang="ja-JP"/>
-          </a:p>
-        </p:txBody>
-      </p:sp>
-    </p:spTree>
-    <p:extLst>
-      <p:ext uri="{BB962C8B-B14F-4D97-AF65-F5344CB8AC3E}">
-        <p14:creationId xmlns:p14="http://schemas.microsoft.com/office/powerpoint/2010/main" val="1704401026"/>
       </p:ext>
     </p:extLst>
   </p:cSld>
